--- a/lab3.pptx
+++ b/lab3.pptx
@@ -30,6 +30,8 @@
     <p:sldId id="278" r:id="rId24"/>
     <p:sldId id="279" r:id="rId25"/>
     <p:sldId id="280" r:id="rId26"/>
+    <p:sldId id="282" r:id="rId33"/>
+    <p:sldId id="283" r:id="rId34"/>
     <p:sldId id="281" r:id="rId27"/>
   </p:sldIdLst>
   <p:notesMasterIdLst>
@@ -29258,6 +29260,3859 @@
 </file>
 
 <file path=ppt/slides/slide26.xml><?xml version="1.0" encoding="utf-8"?>
+<p:sld xmlns:a="http://schemas.openxmlformats.org/drawingml/2006/main" xmlns:p="http://schemas.openxmlformats.org/presentationml/2006/main" xmlns:r="http://schemas.openxmlformats.org/officeDocument/2006/relationships">
+  <p:cSld>
+    <p:spTree>
+      <p:nvGrpSpPr>
+        <p:cNvPr id="1" name=""/>
+        <p:cNvGrpSpPr/>
+        <p:nvPr/>
+      </p:nvGrpSpPr>
+      <p:grpSpPr/>
+      <p:sp>
+        <p:nvSpPr>
+          <p:cNvPr id="2" name="Rectangle 1"/>
+          <p:cNvSpPr/>
+          <p:nvPr/>
+        </p:nvSpPr>
+        <p:spPr>
+          <a:xfrm>
+            <a:off x="0" y="0"/>
+            <a:ext cx="12191695" cy="6858000"/>
+          </a:xfrm>
+          <a:prstGeom prst="rect">
+            <a:avLst/>
+          </a:prstGeom>
+          <a:solidFill>
+            <a:srgbClr val="101722"/>
+          </a:solidFill>
+          <a:ln>
+            <a:noFill/>
+          </a:ln>
+          <a:effectLst/>
+        </p:spPr>
+        <p:style>
+          <a:lnRef idx="1">
+            <a:schemeClr val="accent1"/>
+          </a:lnRef>
+          <a:fillRef idx="3">
+            <a:schemeClr val="accent1"/>
+          </a:fillRef>
+          <a:effectRef idx="2">
+            <a:schemeClr val="accent1"/>
+          </a:effectRef>
+          <a:fontRef idx="minor">
+            <a:schemeClr val="lt1"/>
+          </a:fontRef>
+        </p:style>
+        <p:txBody>
+          <a:bodyPr rtlCol="0" anchor="ctr"/>
+          <a:lstStyle/>
+          <a:p>
+            <a:pPr algn="ctr"/>
+          </a:p>
+        </p:txBody>
+      </p:sp>
+      <p:sp>
+        <p:nvSpPr>
+          <p:cNvPr id="3" name="TextBox 2"/>
+          <p:cNvSpPr txBox="1"/>
+          <p:nvPr/>
+        </p:nvSpPr>
+        <p:spPr>
+          <a:xfrm>
+            <a:off x="457200" y="384048"/>
+            <a:ext cx="7315200" cy="320040"/>
+          </a:xfrm>
+          <a:prstGeom prst="rect">
+            <a:avLst/>
+          </a:prstGeom>
+          <a:noFill/>
+        </p:spPr>
+        <p:txBody>
+          <a:bodyPr wrap="square" anchor="t" lIns="0" rIns="0" tIns="0" bIns="0">
+            <a:spAutoFit/>
+          </a:bodyPr>
+          <a:lstStyle/>
+          <a:p>
+            <a:pPr algn="l">
+              <a:lnSpc>
+                <a:spcPct val="115000"/>
+              </a:lnSpc>
+            </a:pPr>
+            <a:r>
+              <a:rPr sz="1250" b="1" i="0">
+                <a:solidFill>
+                  <a:srgbClr val="2CE6C0"/>
+                </a:solidFill>
+                <a:latin typeface="Consolas"/>
+              </a:rPr>
+              <a:t>HANDS-ON</a:t>
+            </a:r>
+          </a:p>
+        </p:txBody>
+      </p:sp>
+      <p:sp>
+        <p:nvSpPr>
+          <p:cNvPr id="4" name="TextBox 3"/>
+          <p:cNvSpPr txBox="1"/>
+          <p:nvPr/>
+        </p:nvSpPr>
+        <p:spPr>
+          <a:xfrm>
+            <a:off x="457200" y="685800"/>
+            <a:ext cx="9875520" cy="640080"/>
+          </a:xfrm>
+          <a:prstGeom prst="rect">
+            <a:avLst/>
+          </a:prstGeom>
+          <a:noFill/>
+        </p:spPr>
+        <p:txBody>
+          <a:bodyPr wrap="square" anchor="t" lIns="0" rIns="0" tIns="0" bIns="0">
+            <a:spAutoFit/>
+          </a:bodyPr>
+          <a:lstStyle/>
+          <a:p>
+            <a:pPr algn="l">
+              <a:lnSpc>
+                <a:spcPct val="115000"/>
+              </a:lnSpc>
+            </a:pPr>
+            <a:r>
+              <a:rPr sz="2500" b="1" i="0">
+                <a:solidFill>
+                  <a:srgbClr val="E9F0F6"/>
+                </a:solidFill>
+                <a:latin typeface="Segoe UI"/>
+              </a:rPr>
+              <a:t>콘솔 어디서 확인하나요 — 7개 탭 지도</a:t>
+            </a:r>
+          </a:p>
+        </p:txBody>
+      </p:sp>
+      <p:sp>
+        <p:nvSpPr>
+          <p:cNvPr id="5" name="TextBox 4"/>
+          <p:cNvSpPr txBox="1"/>
+          <p:nvPr/>
+        </p:nvSpPr>
+        <p:spPr>
+          <a:xfrm>
+            <a:off x="457200" y="1298448"/>
+            <a:ext cx="10607040" cy="365760"/>
+          </a:xfrm>
+          <a:prstGeom prst="rect">
+            <a:avLst/>
+          </a:prstGeom>
+          <a:noFill/>
+        </p:spPr>
+        <p:txBody>
+          <a:bodyPr wrap="square" anchor="t" lIns="0" rIns="0" tIns="0" bIns="0">
+            <a:spAutoFit/>
+          </a:bodyPr>
+          <a:lstStyle/>
+          <a:p>
+            <a:pPr algn="l">
+              <a:lnSpc>
+                <a:spcPct val="115000"/>
+              </a:lnSpc>
+            </a:pPr>
+            <a:r>
+              <a:rPr sz="1200" b="0" i="0">
+                <a:solidFill>
+                  <a:srgbClr val="93A4B4"/>
+                </a:solidFill>
+                <a:latin typeface="Segoe UI"/>
+              </a:rPr>
+              <a:t>슬라이드에서 배운 개념이 실제 콘솔(cyto_seq_console.html)의 어느 탭·버튼·로그에 대응하는지 정리합니다.</a:t>
+            </a:r>
+          </a:p>
+        </p:txBody>
+      </p:sp>
+      <p:sp>
+        <p:nvSpPr>
+          <p:cNvPr id="6" name="Rectangle 5"/>
+          <p:cNvSpPr/>
+          <p:nvPr/>
+        </p:nvSpPr>
+        <p:spPr>
+          <a:xfrm>
+            <a:off x="457200" y="1783080"/>
+            <a:ext cx="2743200" cy="457200"/>
+          </a:xfrm>
+          <a:prstGeom prst="rect">
+            <a:avLst/>
+          </a:prstGeom>
+          <a:solidFill>
+            <a:srgbClr val="1B2534"/>
+          </a:solidFill>
+          <a:ln w="9525">
+            <a:solidFill>
+              <a:srgbClr val="232C39"/>
+            </a:solidFill>
+          </a:ln>
+          <a:effectLst/>
+        </p:spPr>
+        <p:style>
+          <a:lnRef idx="1">
+            <a:schemeClr val="accent1"/>
+          </a:lnRef>
+          <a:fillRef idx="3">
+            <a:schemeClr val="accent1"/>
+          </a:fillRef>
+          <a:effectRef idx="2">
+            <a:schemeClr val="accent1"/>
+          </a:effectRef>
+          <a:fontRef idx="minor">
+            <a:schemeClr val="lt1"/>
+          </a:fontRef>
+        </p:style>
+        <p:txBody>
+          <a:bodyPr rtlCol="0" anchor="ctr"/>
+          <a:lstStyle/>
+          <a:p>
+            <a:pPr algn="ctr"/>
+          </a:p>
+        </p:txBody>
+      </p:sp>
+      <p:sp>
+        <p:nvSpPr>
+          <p:cNvPr id="7" name="TextBox 6"/>
+          <p:cNvSpPr txBox="1"/>
+          <p:nvPr/>
+        </p:nvSpPr>
+        <p:spPr>
+          <a:xfrm>
+            <a:off x="566928" y="1783080"/>
+            <a:ext cx="2523744" cy="457200"/>
+          </a:xfrm>
+          <a:prstGeom prst="rect">
+            <a:avLst/>
+          </a:prstGeom>
+          <a:noFill/>
+        </p:spPr>
+        <p:txBody>
+          <a:bodyPr wrap="square" anchor="ctr" lIns="0" rIns="0" tIns="0" bIns="0">
+            <a:spAutoFit/>
+          </a:bodyPr>
+          <a:lstStyle/>
+          <a:p>
+            <a:pPr algn="l">
+              <a:lnSpc>
+                <a:spcPct val="115000"/>
+              </a:lnSpc>
+            </a:pPr>
+            <a:r>
+              <a:rPr sz="1100" b="1" i="0">
+                <a:solidFill>
+                  <a:srgbClr val="2CE6C0"/>
+                </a:solidFill>
+                <a:latin typeface="Consolas"/>
+              </a:rPr>
+              <a:t>개념</a:t>
+            </a:r>
+          </a:p>
+        </p:txBody>
+      </p:sp>
+      <p:sp>
+        <p:nvSpPr>
+          <p:cNvPr id="8" name="Rectangle 7"/>
+          <p:cNvSpPr/>
+          <p:nvPr/>
+        </p:nvSpPr>
+        <p:spPr>
+          <a:xfrm>
+            <a:off x="3200400" y="1783080"/>
+            <a:ext cx="2377440" cy="457200"/>
+          </a:xfrm>
+          <a:prstGeom prst="rect">
+            <a:avLst/>
+          </a:prstGeom>
+          <a:solidFill>
+            <a:srgbClr val="1B2534"/>
+          </a:solidFill>
+          <a:ln w="9525">
+            <a:solidFill>
+              <a:srgbClr val="232C39"/>
+            </a:solidFill>
+          </a:ln>
+          <a:effectLst/>
+        </p:spPr>
+        <p:style>
+          <a:lnRef idx="1">
+            <a:schemeClr val="accent1"/>
+          </a:lnRef>
+          <a:fillRef idx="3">
+            <a:schemeClr val="accent1"/>
+          </a:fillRef>
+          <a:effectRef idx="2">
+            <a:schemeClr val="accent1"/>
+          </a:effectRef>
+          <a:fontRef idx="minor">
+            <a:schemeClr val="lt1"/>
+          </a:fontRef>
+        </p:style>
+        <p:txBody>
+          <a:bodyPr rtlCol="0" anchor="ctr"/>
+          <a:lstStyle/>
+          <a:p>
+            <a:pPr algn="ctr"/>
+          </a:p>
+        </p:txBody>
+      </p:sp>
+      <p:sp>
+        <p:nvSpPr>
+          <p:cNvPr id="9" name="TextBox 8"/>
+          <p:cNvSpPr txBox="1"/>
+          <p:nvPr/>
+        </p:nvSpPr>
+        <p:spPr>
+          <a:xfrm>
+            <a:off x="3310128" y="1783080"/>
+            <a:ext cx="2157984" cy="457200"/>
+          </a:xfrm>
+          <a:prstGeom prst="rect">
+            <a:avLst/>
+          </a:prstGeom>
+          <a:noFill/>
+        </p:spPr>
+        <p:txBody>
+          <a:bodyPr wrap="square" anchor="ctr" lIns="0" rIns="0" tIns="0" bIns="0">
+            <a:spAutoFit/>
+          </a:bodyPr>
+          <a:lstStyle/>
+          <a:p>
+            <a:pPr algn="l">
+              <a:lnSpc>
+                <a:spcPct val="115000"/>
+              </a:lnSpc>
+            </a:pPr>
+            <a:r>
+              <a:rPr sz="1100" b="1" i="0">
+                <a:solidFill>
+                  <a:srgbClr val="2CE6C0"/>
+                </a:solidFill>
+                <a:latin typeface="Consolas"/>
+              </a:rPr>
+              <a:t>콘솔 위치</a:t>
+            </a:r>
+          </a:p>
+        </p:txBody>
+      </p:sp>
+      <p:sp>
+        <p:nvSpPr>
+          <p:cNvPr id="10" name="Rectangle 9"/>
+          <p:cNvSpPr/>
+          <p:nvPr/>
+        </p:nvSpPr>
+        <p:spPr>
+          <a:xfrm>
+            <a:off x="5577840" y="1783080"/>
+            <a:ext cx="5394960" cy="457200"/>
+          </a:xfrm>
+          <a:prstGeom prst="rect">
+            <a:avLst/>
+          </a:prstGeom>
+          <a:solidFill>
+            <a:srgbClr val="1B2534"/>
+          </a:solidFill>
+          <a:ln w="9525">
+            <a:solidFill>
+              <a:srgbClr val="232C39"/>
+            </a:solidFill>
+          </a:ln>
+          <a:effectLst/>
+        </p:spPr>
+        <p:style>
+          <a:lnRef idx="1">
+            <a:schemeClr val="accent1"/>
+          </a:lnRef>
+          <a:fillRef idx="3">
+            <a:schemeClr val="accent1"/>
+          </a:fillRef>
+          <a:effectRef idx="2">
+            <a:schemeClr val="accent1"/>
+          </a:effectRef>
+          <a:fontRef idx="minor">
+            <a:schemeClr val="lt1"/>
+          </a:fontRef>
+        </p:style>
+        <p:txBody>
+          <a:bodyPr rtlCol="0" anchor="ctr"/>
+          <a:lstStyle/>
+          <a:p>
+            <a:pPr algn="ctr"/>
+          </a:p>
+        </p:txBody>
+      </p:sp>
+      <p:sp>
+        <p:nvSpPr>
+          <p:cNvPr id="11" name="TextBox 10"/>
+          <p:cNvSpPr txBox="1"/>
+          <p:nvPr/>
+        </p:nvSpPr>
+        <p:spPr>
+          <a:xfrm>
+            <a:off x="5687568" y="1783080"/>
+            <a:ext cx="5175504" cy="457200"/>
+          </a:xfrm>
+          <a:prstGeom prst="rect">
+            <a:avLst/>
+          </a:prstGeom>
+          <a:noFill/>
+        </p:spPr>
+        <p:txBody>
+          <a:bodyPr wrap="square" anchor="ctr" lIns="0" rIns="0" tIns="0" bIns="0">
+            <a:spAutoFit/>
+          </a:bodyPr>
+          <a:lstStyle/>
+          <a:p>
+            <a:pPr algn="l">
+              <a:lnSpc>
+                <a:spcPct val="115000"/>
+              </a:lnSpc>
+            </a:pPr>
+            <a:r>
+              <a:rPr sz="1100" b="1" i="0">
+                <a:solidFill>
+                  <a:srgbClr val="2CE6C0"/>
+                </a:solidFill>
+                <a:latin typeface="Consolas"/>
+              </a:rPr>
+              <a:t>확인할 것</a:t>
+            </a:r>
+          </a:p>
+        </p:txBody>
+      </p:sp>
+      <p:sp>
+        <p:nvSpPr>
+          <p:cNvPr id="12" name="Rectangle 11"/>
+          <p:cNvSpPr/>
+          <p:nvPr/>
+        </p:nvSpPr>
+        <p:spPr>
+          <a:xfrm>
+            <a:off x="457200" y="2240280"/>
+            <a:ext cx="2743200" cy="457200"/>
+          </a:xfrm>
+          <a:prstGeom prst="rect">
+            <a:avLst/>
+          </a:prstGeom>
+          <a:solidFill>
+            <a:srgbClr val="101722"/>
+          </a:solidFill>
+          <a:ln w="9525">
+            <a:solidFill>
+              <a:srgbClr val="232C39"/>
+            </a:solidFill>
+          </a:ln>
+          <a:effectLst/>
+        </p:spPr>
+        <p:style>
+          <a:lnRef idx="1">
+            <a:schemeClr val="accent1"/>
+          </a:lnRef>
+          <a:fillRef idx="3">
+            <a:schemeClr val="accent1"/>
+          </a:fillRef>
+          <a:effectRef idx="2">
+            <a:schemeClr val="accent1"/>
+          </a:effectRef>
+          <a:fontRef idx="minor">
+            <a:schemeClr val="lt1"/>
+          </a:fontRef>
+        </p:style>
+        <p:txBody>
+          <a:bodyPr rtlCol="0" anchor="ctr"/>
+          <a:lstStyle/>
+          <a:p>
+            <a:pPr algn="ctr"/>
+          </a:p>
+        </p:txBody>
+      </p:sp>
+      <p:sp>
+        <p:nvSpPr>
+          <p:cNvPr id="13" name="TextBox 12"/>
+          <p:cNvSpPr txBox="1"/>
+          <p:nvPr/>
+        </p:nvSpPr>
+        <p:spPr>
+          <a:xfrm>
+            <a:off x="566928" y="2240280"/>
+            <a:ext cx="2523744" cy="457200"/>
+          </a:xfrm>
+          <a:prstGeom prst="rect">
+            <a:avLst/>
+          </a:prstGeom>
+          <a:noFill/>
+        </p:spPr>
+        <p:txBody>
+          <a:bodyPr wrap="square" anchor="ctr" lIns="0" rIns="0" tIns="0" bIns="0">
+            <a:spAutoFit/>
+          </a:bodyPr>
+          <a:lstStyle/>
+          <a:p>
+            <a:pPr algn="l">
+              <a:lnSpc>
+                <a:spcPct val="115000"/>
+              </a:lnSpc>
+            </a:pPr>
+            <a:r>
+              <a:rPr sz="1050" b="1" i="0">
+                <a:solidFill>
+                  <a:srgbClr val="E9F0F6"/>
+                </a:solidFill>
+                <a:latin typeface="Consolas"/>
+              </a:rPr>
+              <a:t>FACS 7단계 조작</a:t>
+            </a:r>
+          </a:p>
+        </p:txBody>
+      </p:sp>
+      <p:sp>
+        <p:nvSpPr>
+          <p:cNvPr id="14" name="Rectangle 13"/>
+          <p:cNvSpPr/>
+          <p:nvPr/>
+        </p:nvSpPr>
+        <p:spPr>
+          <a:xfrm>
+            <a:off x="3200400" y="2240280"/>
+            <a:ext cx="2377440" cy="457200"/>
+          </a:xfrm>
+          <a:prstGeom prst="rect">
+            <a:avLst/>
+          </a:prstGeom>
+          <a:solidFill>
+            <a:srgbClr val="101722"/>
+          </a:solidFill>
+          <a:ln w="9525">
+            <a:solidFill>
+              <a:srgbClr val="232C39"/>
+            </a:solidFill>
+          </a:ln>
+          <a:effectLst/>
+        </p:spPr>
+        <p:style>
+          <a:lnRef idx="1">
+            <a:schemeClr val="accent1"/>
+          </a:lnRef>
+          <a:fillRef idx="3">
+            <a:schemeClr val="accent1"/>
+          </a:fillRef>
+          <a:effectRef idx="2">
+            <a:schemeClr val="accent1"/>
+          </a:effectRef>
+          <a:fontRef idx="minor">
+            <a:schemeClr val="lt1"/>
+          </a:fontRef>
+        </p:style>
+        <p:txBody>
+          <a:bodyPr rtlCol="0" anchor="ctr"/>
+          <a:lstStyle/>
+          <a:p>
+            <a:pPr algn="ctr"/>
+          </a:p>
+        </p:txBody>
+      </p:sp>
+      <p:sp>
+        <p:nvSpPr>
+          <p:cNvPr id="15" name="TextBox 14"/>
+          <p:cNvSpPr txBox="1"/>
+          <p:nvPr/>
+        </p:nvSpPr>
+        <p:spPr>
+          <a:xfrm>
+            <a:off x="3310128" y="2240280"/>
+            <a:ext cx="2157984" cy="457200"/>
+          </a:xfrm>
+          <a:prstGeom prst="rect">
+            <a:avLst/>
+          </a:prstGeom>
+          <a:noFill/>
+        </p:spPr>
+        <p:txBody>
+          <a:bodyPr wrap="square" anchor="ctr" lIns="0" rIns="0" tIns="0" bIns="0">
+            <a:spAutoFit/>
+          </a:bodyPr>
+          <a:lstStyle/>
+          <a:p>
+            <a:pPr algn="l">
+              <a:lnSpc>
+                <a:spcPct val="115000"/>
+              </a:lnSpc>
+            </a:pPr>
+            <a:r>
+              <a:rPr sz="1050" b="0" i="0">
+                <a:solidFill>
+                  <a:srgbClr val="93A4B4"/>
+                </a:solidFill>
+                <a:latin typeface="Consolas"/>
+              </a:rPr>
+              <a:t>01 · FACS 기기</a:t>
+            </a:r>
+          </a:p>
+        </p:txBody>
+      </p:sp>
+      <p:sp>
+        <p:nvSpPr>
+          <p:cNvPr id="16" name="Rectangle 15"/>
+          <p:cNvSpPr/>
+          <p:nvPr/>
+        </p:nvSpPr>
+        <p:spPr>
+          <a:xfrm>
+            <a:off x="5577840" y="2240280"/>
+            <a:ext cx="5394960" cy="457200"/>
+          </a:xfrm>
+          <a:prstGeom prst="rect">
+            <a:avLst/>
+          </a:prstGeom>
+          <a:solidFill>
+            <a:srgbClr val="101722"/>
+          </a:solidFill>
+          <a:ln w="9525">
+            <a:solidFill>
+              <a:srgbClr val="232C39"/>
+            </a:solidFill>
+          </a:ln>
+          <a:effectLst/>
+        </p:spPr>
+        <p:style>
+          <a:lnRef idx="1">
+            <a:schemeClr val="accent1"/>
+          </a:lnRef>
+          <a:fillRef idx="3">
+            <a:schemeClr val="accent1"/>
+          </a:fillRef>
+          <a:effectRef idx="2">
+            <a:schemeClr val="accent1"/>
+          </a:effectRef>
+          <a:fontRef idx="minor">
+            <a:schemeClr val="lt1"/>
+          </a:fontRef>
+        </p:style>
+        <p:txBody>
+          <a:bodyPr rtlCol="0" anchor="ctr"/>
+          <a:lstStyle/>
+          <a:p>
+            <a:pPr algn="ctr"/>
+          </a:p>
+        </p:txBody>
+      </p:sp>
+      <p:sp>
+        <p:nvSpPr>
+          <p:cNvPr id="17" name="TextBox 16"/>
+          <p:cNvSpPr txBox="1"/>
+          <p:nvPr/>
+        </p:nvSpPr>
+        <p:spPr>
+          <a:xfrm>
+            <a:off x="5687568" y="2240280"/>
+            <a:ext cx="5175504" cy="457200"/>
+          </a:xfrm>
+          <a:prstGeom prst="rect">
+            <a:avLst/>
+          </a:prstGeom>
+          <a:noFill/>
+        </p:spPr>
+        <p:txBody>
+          <a:bodyPr wrap="square" anchor="ctr" lIns="0" rIns="0" tIns="0" bIns="0">
+            <a:spAutoFit/>
+          </a:bodyPr>
+          <a:lstStyle/>
+          <a:p>
+            <a:pPr algn="l">
+              <a:lnSpc>
+                <a:spcPct val="115000"/>
+              </a:lnSpc>
+            </a:pPr>
+            <a:r>
+              <a:rPr sz="1050" b="0" i="0">
+                <a:solidFill>
+                  <a:srgbClr val="93A4B4"/>
+                </a:solidFill>
+                <a:latin typeface="Segoe UI"/>
+              </a:rPr>
+              <a:t>단계별 모식도 + "왜 필요한가" 설명</a:t>
+            </a:r>
+          </a:p>
+        </p:txBody>
+      </p:sp>
+      <p:sp>
+        <p:nvSpPr>
+          <p:cNvPr id="18" name="Rectangle 17"/>
+          <p:cNvSpPr/>
+          <p:nvPr/>
+        </p:nvSpPr>
+        <p:spPr>
+          <a:xfrm>
+            <a:off x="457200" y="2697480"/>
+            <a:ext cx="2743200" cy="457200"/>
+          </a:xfrm>
+          <a:prstGeom prst="rect">
+            <a:avLst/>
+          </a:prstGeom>
+          <a:solidFill>
+            <a:srgbClr val="141C28"/>
+          </a:solidFill>
+          <a:ln w="9525">
+            <a:solidFill>
+              <a:srgbClr val="232C39"/>
+            </a:solidFill>
+          </a:ln>
+          <a:effectLst/>
+        </p:spPr>
+        <p:style>
+          <a:lnRef idx="1">
+            <a:schemeClr val="accent1"/>
+          </a:lnRef>
+          <a:fillRef idx="3">
+            <a:schemeClr val="accent1"/>
+          </a:fillRef>
+          <a:effectRef idx="2">
+            <a:schemeClr val="accent1"/>
+          </a:effectRef>
+          <a:fontRef idx="minor">
+            <a:schemeClr val="lt1"/>
+          </a:fontRef>
+        </p:style>
+        <p:txBody>
+          <a:bodyPr rtlCol="0" anchor="ctr"/>
+          <a:lstStyle/>
+          <a:p>
+            <a:pPr algn="ctr"/>
+          </a:p>
+        </p:txBody>
+      </p:sp>
+      <p:sp>
+        <p:nvSpPr>
+          <p:cNvPr id="19" name="TextBox 18"/>
+          <p:cNvSpPr txBox="1"/>
+          <p:nvPr/>
+        </p:nvSpPr>
+        <p:spPr>
+          <a:xfrm>
+            <a:off x="566928" y="2697480"/>
+            <a:ext cx="2523744" cy="457200"/>
+          </a:xfrm>
+          <a:prstGeom prst="rect">
+            <a:avLst/>
+          </a:prstGeom>
+          <a:noFill/>
+        </p:spPr>
+        <p:txBody>
+          <a:bodyPr wrap="square" anchor="ctr" lIns="0" rIns="0" tIns="0" bIns="0">
+            <a:spAutoFit/>
+          </a:bodyPr>
+          <a:lstStyle/>
+          <a:p>
+            <a:pPr algn="l">
+              <a:lnSpc>
+                <a:spcPct val="115000"/>
+              </a:lnSpc>
+            </a:pPr>
+            <a:r>
+              <a:rPr sz="1050" b="1" i="0">
+                <a:solidFill>
+                  <a:srgbClr val="E9F0F6"/>
+                </a:solidFill>
+                <a:latin typeface="Consolas"/>
+              </a:rPr>
+              <a:t>게이팅 · 컴펜세이션</a:t>
+            </a:r>
+          </a:p>
+        </p:txBody>
+      </p:sp>
+      <p:sp>
+        <p:nvSpPr>
+          <p:cNvPr id="20" name="Rectangle 19"/>
+          <p:cNvSpPr/>
+          <p:nvPr/>
+        </p:nvSpPr>
+        <p:spPr>
+          <a:xfrm>
+            <a:off x="3200400" y="2697480"/>
+            <a:ext cx="2377440" cy="457200"/>
+          </a:xfrm>
+          <a:prstGeom prst="rect">
+            <a:avLst/>
+          </a:prstGeom>
+          <a:solidFill>
+            <a:srgbClr val="141C28"/>
+          </a:solidFill>
+          <a:ln w="9525">
+            <a:solidFill>
+              <a:srgbClr val="232C39"/>
+            </a:solidFill>
+          </a:ln>
+          <a:effectLst/>
+        </p:spPr>
+        <p:style>
+          <a:lnRef idx="1">
+            <a:schemeClr val="accent1"/>
+          </a:lnRef>
+          <a:fillRef idx="3">
+            <a:schemeClr val="accent1"/>
+          </a:fillRef>
+          <a:effectRef idx="2">
+            <a:schemeClr val="accent1"/>
+          </a:effectRef>
+          <a:fontRef idx="minor">
+            <a:schemeClr val="lt1"/>
+          </a:fontRef>
+        </p:style>
+        <p:txBody>
+          <a:bodyPr rtlCol="0" anchor="ctr"/>
+          <a:lstStyle/>
+          <a:p>
+            <a:pPr algn="ctr"/>
+          </a:p>
+        </p:txBody>
+      </p:sp>
+      <p:sp>
+        <p:nvSpPr>
+          <p:cNvPr id="21" name="TextBox 20"/>
+          <p:cNvSpPr txBox="1"/>
+          <p:nvPr/>
+        </p:nvSpPr>
+        <p:spPr>
+          <a:xfrm>
+            <a:off x="3310128" y="2697480"/>
+            <a:ext cx="2157984" cy="457200"/>
+          </a:xfrm>
+          <a:prstGeom prst="rect">
+            <a:avLst/>
+          </a:prstGeom>
+          <a:noFill/>
+        </p:spPr>
+        <p:txBody>
+          <a:bodyPr wrap="square" anchor="ctr" lIns="0" rIns="0" tIns="0" bIns="0">
+            <a:spAutoFit/>
+          </a:bodyPr>
+          <a:lstStyle/>
+          <a:p>
+            <a:pPr algn="l">
+              <a:lnSpc>
+                <a:spcPct val="115000"/>
+              </a:lnSpc>
+            </a:pPr>
+            <a:r>
+              <a:rPr sz="1050" b="0" i="0">
+                <a:solidFill>
+                  <a:srgbClr val="93A4B4"/>
+                </a:solidFill>
+                <a:latin typeface="Consolas"/>
+              </a:rPr>
+              <a:t>02 · FACS 해석</a:t>
+            </a:r>
+          </a:p>
+        </p:txBody>
+      </p:sp>
+      <p:sp>
+        <p:nvSpPr>
+          <p:cNvPr id="22" name="Rectangle 21"/>
+          <p:cNvSpPr/>
+          <p:nvPr/>
+        </p:nvSpPr>
+        <p:spPr>
+          <a:xfrm>
+            <a:off x="5577840" y="2697480"/>
+            <a:ext cx="5394960" cy="457200"/>
+          </a:xfrm>
+          <a:prstGeom prst="rect">
+            <a:avLst/>
+          </a:prstGeom>
+          <a:solidFill>
+            <a:srgbClr val="141C28"/>
+          </a:solidFill>
+          <a:ln w="9525">
+            <a:solidFill>
+              <a:srgbClr val="232C39"/>
+            </a:solidFill>
+          </a:ln>
+          <a:effectLst/>
+        </p:spPr>
+        <p:style>
+          <a:lnRef idx="1">
+            <a:schemeClr val="accent1"/>
+          </a:lnRef>
+          <a:fillRef idx="3">
+            <a:schemeClr val="accent1"/>
+          </a:fillRef>
+          <a:effectRef idx="2">
+            <a:schemeClr val="accent1"/>
+          </a:effectRef>
+          <a:fontRef idx="minor">
+            <a:schemeClr val="lt1"/>
+          </a:fontRef>
+        </p:style>
+        <p:txBody>
+          <a:bodyPr rtlCol="0" anchor="ctr"/>
+          <a:lstStyle/>
+          <a:p>
+            <a:pPr algn="ctr"/>
+          </a:p>
+        </p:txBody>
+      </p:sp>
+      <p:sp>
+        <p:nvSpPr>
+          <p:cNvPr id="23" name="TextBox 22"/>
+          <p:cNvSpPr txBox="1"/>
+          <p:nvPr/>
+        </p:nvSpPr>
+        <p:spPr>
+          <a:xfrm>
+            <a:off x="5687568" y="2697480"/>
+            <a:ext cx="5175504" cy="457200"/>
+          </a:xfrm>
+          <a:prstGeom prst="rect">
+            <a:avLst/>
+          </a:prstGeom>
+          <a:noFill/>
+        </p:spPr>
+        <p:txBody>
+          <a:bodyPr wrap="square" anchor="ctr" lIns="0" rIns="0" tIns="0" bIns="0">
+            <a:spAutoFit/>
+          </a:bodyPr>
+          <a:lstStyle/>
+          <a:p>
+            <a:pPr algn="l">
+              <a:lnSpc>
+                <a:spcPct val="115000"/>
+              </a:lnSpc>
+            </a:pPr>
+            <a:r>
+              <a:rPr sz="1050" b="0" i="0">
+                <a:solidFill>
+                  <a:srgbClr val="93A4B4"/>
+                </a:solidFill>
+                <a:latin typeface="Segoe UI"/>
+              </a:rPr>
+              <a:t>드래그 게이팅, compensation 토글, interaction terminal</a:t>
+            </a:r>
+          </a:p>
+        </p:txBody>
+      </p:sp>
+      <p:sp>
+        <p:nvSpPr>
+          <p:cNvPr id="24" name="Rectangle 23"/>
+          <p:cNvSpPr/>
+          <p:nvPr/>
+        </p:nvSpPr>
+        <p:spPr>
+          <a:xfrm>
+            <a:off x="457200" y="3154680"/>
+            <a:ext cx="2743200" cy="457200"/>
+          </a:xfrm>
+          <a:prstGeom prst="rect">
+            <a:avLst/>
+          </a:prstGeom>
+          <a:solidFill>
+            <a:srgbClr val="101722"/>
+          </a:solidFill>
+          <a:ln w="9525">
+            <a:solidFill>
+              <a:srgbClr val="232C39"/>
+            </a:solidFill>
+          </a:ln>
+          <a:effectLst/>
+        </p:spPr>
+        <p:style>
+          <a:lnRef idx="1">
+            <a:schemeClr val="accent1"/>
+          </a:lnRef>
+          <a:fillRef idx="3">
+            <a:schemeClr val="accent1"/>
+          </a:fillRef>
+          <a:effectRef idx="2">
+            <a:schemeClr val="accent1"/>
+          </a:effectRef>
+          <a:fontRef idx="minor">
+            <a:schemeClr val="lt1"/>
+          </a:fontRef>
+        </p:style>
+        <p:txBody>
+          <a:bodyPr rtlCol="0" anchor="ctr"/>
+          <a:lstStyle/>
+          <a:p>
+            <a:pPr algn="ctr"/>
+          </a:p>
+        </p:txBody>
+      </p:sp>
+      <p:sp>
+        <p:nvSpPr>
+          <p:cNvPr id="25" name="TextBox 24"/>
+          <p:cNvSpPr txBox="1"/>
+          <p:nvPr/>
+        </p:nvSpPr>
+        <p:spPr>
+          <a:xfrm>
+            <a:off x="566928" y="3154680"/>
+            <a:ext cx="2523744" cy="457200"/>
+          </a:xfrm>
+          <a:prstGeom prst="rect">
+            <a:avLst/>
+          </a:prstGeom>
+          <a:noFill/>
+        </p:spPr>
+        <p:txBody>
+          <a:bodyPr wrap="square" anchor="ctr" lIns="0" rIns="0" tIns="0" bIns="0">
+            <a:spAutoFit/>
+          </a:bodyPr>
+          <a:lstStyle/>
+          <a:p>
+            <a:pPr algn="l">
+              <a:lnSpc>
+                <a:spcPct val="115000"/>
+              </a:lnSpc>
+            </a:pPr>
+            <a:r>
+              <a:rPr sz="1050" b="1" i="0">
+                <a:solidFill>
+                  <a:srgbClr val="E9F0F6"/>
+                </a:solidFill>
+                <a:latin typeface="Consolas"/>
+              </a:rPr>
+              <a:t>QC 지표</a:t>
+            </a:r>
+          </a:p>
+        </p:txBody>
+      </p:sp>
+      <p:sp>
+        <p:nvSpPr>
+          <p:cNvPr id="26" name="Rectangle 25"/>
+          <p:cNvSpPr/>
+          <p:nvPr/>
+        </p:nvSpPr>
+        <p:spPr>
+          <a:xfrm>
+            <a:off x="3200400" y="3154680"/>
+            <a:ext cx="2377440" cy="457200"/>
+          </a:xfrm>
+          <a:prstGeom prst="rect">
+            <a:avLst/>
+          </a:prstGeom>
+          <a:solidFill>
+            <a:srgbClr val="101722"/>
+          </a:solidFill>
+          <a:ln w="9525">
+            <a:solidFill>
+              <a:srgbClr val="232C39"/>
+            </a:solidFill>
+          </a:ln>
+          <a:effectLst/>
+        </p:spPr>
+        <p:style>
+          <a:lnRef idx="1">
+            <a:schemeClr val="accent1"/>
+          </a:lnRef>
+          <a:fillRef idx="3">
+            <a:schemeClr val="accent1"/>
+          </a:fillRef>
+          <a:effectRef idx="2">
+            <a:schemeClr val="accent1"/>
+          </a:effectRef>
+          <a:fontRef idx="minor">
+            <a:schemeClr val="lt1"/>
+          </a:fontRef>
+        </p:style>
+        <p:txBody>
+          <a:bodyPr rtlCol="0" anchor="ctr"/>
+          <a:lstStyle/>
+          <a:p>
+            <a:pPr algn="ctr"/>
+          </a:p>
+        </p:txBody>
+      </p:sp>
+      <p:sp>
+        <p:nvSpPr>
+          <p:cNvPr id="27" name="TextBox 26"/>
+          <p:cNvSpPr txBox="1"/>
+          <p:nvPr/>
+        </p:nvSpPr>
+        <p:spPr>
+          <a:xfrm>
+            <a:off x="3310128" y="3154680"/>
+            <a:ext cx="2157984" cy="457200"/>
+          </a:xfrm>
+          <a:prstGeom prst="rect">
+            <a:avLst/>
+          </a:prstGeom>
+          <a:noFill/>
+        </p:spPr>
+        <p:txBody>
+          <a:bodyPr wrap="square" anchor="ctr" lIns="0" rIns="0" tIns="0" bIns="0">
+            <a:spAutoFit/>
+          </a:bodyPr>
+          <a:lstStyle/>
+          <a:p>
+            <a:pPr algn="l">
+              <a:lnSpc>
+                <a:spcPct val="115000"/>
+              </a:lnSpc>
+            </a:pPr>
+            <a:r>
+              <a:rPr sz="1050" b="0" i="0">
+                <a:solidFill>
+                  <a:srgbClr val="93A4B4"/>
+                </a:solidFill>
+                <a:latin typeface="Consolas"/>
+              </a:rPr>
+              <a:t>04 · STEP 2</a:t>
+            </a:r>
+          </a:p>
+        </p:txBody>
+      </p:sp>
+      <p:sp>
+        <p:nvSpPr>
+          <p:cNvPr id="28" name="Rectangle 27"/>
+          <p:cNvSpPr/>
+          <p:nvPr/>
+        </p:nvSpPr>
+        <p:spPr>
+          <a:xfrm>
+            <a:off x="5577840" y="3154680"/>
+            <a:ext cx="5394960" cy="457200"/>
+          </a:xfrm>
+          <a:prstGeom prst="rect">
+            <a:avLst/>
+          </a:prstGeom>
+          <a:solidFill>
+            <a:srgbClr val="101722"/>
+          </a:solidFill>
+          <a:ln w="9525">
+            <a:solidFill>
+              <a:srgbClr val="232C39"/>
+            </a:solidFill>
+          </a:ln>
+          <a:effectLst/>
+        </p:spPr>
+        <p:style>
+          <a:lnRef idx="1">
+            <a:schemeClr val="accent1"/>
+          </a:lnRef>
+          <a:fillRef idx="3">
+            <a:schemeClr val="accent1"/>
+          </a:fillRef>
+          <a:effectRef idx="2">
+            <a:schemeClr val="accent1"/>
+          </a:effectRef>
+          <a:fontRef idx="minor">
+            <a:schemeClr val="lt1"/>
+          </a:fontRef>
+        </p:style>
+        <p:txBody>
+          <a:bodyPr rtlCol="0" anchor="ctr"/>
+          <a:lstStyle/>
+          <a:p>
+            <a:pPr algn="ctr"/>
+          </a:p>
+        </p:txBody>
+      </p:sp>
+      <p:sp>
+        <p:nvSpPr>
+          <p:cNvPr id="29" name="TextBox 28"/>
+          <p:cNvSpPr txBox="1"/>
+          <p:nvPr/>
+        </p:nvSpPr>
+        <p:spPr>
+          <a:xfrm>
+            <a:off x="5687568" y="3154680"/>
+            <a:ext cx="5175504" cy="457200"/>
+          </a:xfrm>
+          <a:prstGeom prst="rect">
+            <a:avLst/>
+          </a:prstGeom>
+          <a:noFill/>
+        </p:spPr>
+        <p:txBody>
+          <a:bodyPr wrap="square" anchor="ctr" lIns="0" rIns="0" tIns="0" bIns="0">
+            <a:spAutoFit/>
+          </a:bodyPr>
+          <a:lstStyle/>
+          <a:p>
+            <a:pPr algn="l">
+              <a:lnSpc>
+                <a:spcPct val="115000"/>
+              </a:lnSpc>
+            </a:pPr>
+            <a:r>
+              <a:rPr sz="1050" b="0" i="0">
+                <a:solidFill>
+                  <a:srgbClr val="93A4B4"/>
+                </a:solidFill>
+                <a:latin typeface="Segoe UI"/>
+              </a:rPr>
+              <a:t>min genes / max mito% 슬라이더 + 파이프라인 터미널의 통과/제외 수</a:t>
+            </a:r>
+          </a:p>
+        </p:txBody>
+      </p:sp>
+      <p:sp>
+        <p:nvSpPr>
+          <p:cNvPr id="30" name="Rectangle 29"/>
+          <p:cNvSpPr/>
+          <p:nvPr/>
+        </p:nvSpPr>
+        <p:spPr>
+          <a:xfrm>
+            <a:off x="457200" y="3611880"/>
+            <a:ext cx="2743200" cy="457200"/>
+          </a:xfrm>
+          <a:prstGeom prst="rect">
+            <a:avLst/>
+          </a:prstGeom>
+          <a:solidFill>
+            <a:srgbClr val="141C28"/>
+          </a:solidFill>
+          <a:ln w="9525">
+            <a:solidFill>
+              <a:srgbClr val="232C39"/>
+            </a:solidFill>
+          </a:ln>
+          <a:effectLst/>
+        </p:spPr>
+        <p:style>
+          <a:lnRef idx="1">
+            <a:schemeClr val="accent1"/>
+          </a:lnRef>
+          <a:fillRef idx="3">
+            <a:schemeClr val="accent1"/>
+          </a:fillRef>
+          <a:effectRef idx="2">
+            <a:schemeClr val="accent1"/>
+          </a:effectRef>
+          <a:fontRef idx="minor">
+            <a:schemeClr val="lt1"/>
+          </a:fontRef>
+        </p:style>
+        <p:txBody>
+          <a:bodyPr rtlCol="0" anchor="ctr"/>
+          <a:lstStyle/>
+          <a:p>
+            <a:pPr algn="ctr"/>
+          </a:p>
+        </p:txBody>
+      </p:sp>
+      <p:sp>
+        <p:nvSpPr>
+          <p:cNvPr id="31" name="TextBox 30"/>
+          <p:cNvSpPr txBox="1"/>
+          <p:nvPr/>
+        </p:nvSpPr>
+        <p:spPr>
+          <a:xfrm>
+            <a:off x="566928" y="3611880"/>
+            <a:ext cx="2523744" cy="457200"/>
+          </a:xfrm>
+          <a:prstGeom prst="rect">
+            <a:avLst/>
+          </a:prstGeom>
+          <a:noFill/>
+        </p:spPr>
+        <p:txBody>
+          <a:bodyPr wrap="square" anchor="ctr" lIns="0" rIns="0" tIns="0" bIns="0">
+            <a:spAutoFit/>
+          </a:bodyPr>
+          <a:lstStyle/>
+          <a:p>
+            <a:pPr algn="l">
+              <a:lnSpc>
+                <a:spcPct val="115000"/>
+              </a:lnSpc>
+            </a:pPr>
+            <a:r>
+              <a:rPr sz="1050" b="1" i="0">
+                <a:solidFill>
+                  <a:srgbClr val="E9F0F6"/>
+                </a:solidFill>
+                <a:latin typeface="Consolas"/>
+              </a:rPr>
+              <a:t>정규화 + PCA</a:t>
+            </a:r>
+          </a:p>
+        </p:txBody>
+      </p:sp>
+      <p:sp>
+        <p:nvSpPr>
+          <p:cNvPr id="32" name="Rectangle 31"/>
+          <p:cNvSpPr/>
+          <p:nvPr/>
+        </p:nvSpPr>
+        <p:spPr>
+          <a:xfrm>
+            <a:off x="3200400" y="3611880"/>
+            <a:ext cx="2377440" cy="457200"/>
+          </a:xfrm>
+          <a:prstGeom prst="rect">
+            <a:avLst/>
+          </a:prstGeom>
+          <a:solidFill>
+            <a:srgbClr val="141C28"/>
+          </a:solidFill>
+          <a:ln w="9525">
+            <a:solidFill>
+              <a:srgbClr val="232C39"/>
+            </a:solidFill>
+          </a:ln>
+          <a:effectLst/>
+        </p:spPr>
+        <p:style>
+          <a:lnRef idx="1">
+            <a:schemeClr val="accent1"/>
+          </a:lnRef>
+          <a:fillRef idx="3">
+            <a:schemeClr val="accent1"/>
+          </a:fillRef>
+          <a:effectRef idx="2">
+            <a:schemeClr val="accent1"/>
+          </a:effectRef>
+          <a:fontRef idx="minor">
+            <a:schemeClr val="lt1"/>
+          </a:fontRef>
+        </p:style>
+        <p:txBody>
+          <a:bodyPr rtlCol="0" anchor="ctr"/>
+          <a:lstStyle/>
+          <a:p>
+            <a:pPr algn="ctr"/>
+          </a:p>
+        </p:txBody>
+      </p:sp>
+      <p:sp>
+        <p:nvSpPr>
+          <p:cNvPr id="33" name="TextBox 32"/>
+          <p:cNvSpPr txBox="1"/>
+          <p:nvPr/>
+        </p:nvSpPr>
+        <p:spPr>
+          <a:xfrm>
+            <a:off x="3310128" y="3611880"/>
+            <a:ext cx="2157984" cy="457200"/>
+          </a:xfrm>
+          <a:prstGeom prst="rect">
+            <a:avLst/>
+          </a:prstGeom>
+          <a:noFill/>
+        </p:spPr>
+        <p:txBody>
+          <a:bodyPr wrap="square" anchor="ctr" lIns="0" rIns="0" tIns="0" bIns="0">
+            <a:spAutoFit/>
+          </a:bodyPr>
+          <a:lstStyle/>
+          <a:p>
+            <a:pPr algn="l">
+              <a:lnSpc>
+                <a:spcPct val="115000"/>
+              </a:lnSpc>
+            </a:pPr>
+            <a:r>
+              <a:rPr sz="1050" b="0" i="0">
+                <a:solidFill>
+                  <a:srgbClr val="93A4B4"/>
+                </a:solidFill>
+                <a:latin typeface="Consolas"/>
+              </a:rPr>
+              <a:t>04 · STEP 3</a:t>
+            </a:r>
+          </a:p>
+        </p:txBody>
+      </p:sp>
+      <p:sp>
+        <p:nvSpPr>
+          <p:cNvPr id="34" name="Rectangle 33"/>
+          <p:cNvSpPr/>
+          <p:nvPr/>
+        </p:nvSpPr>
+        <p:spPr>
+          <a:xfrm>
+            <a:off x="5577840" y="3611880"/>
+            <a:ext cx="5394960" cy="457200"/>
+          </a:xfrm>
+          <a:prstGeom prst="rect">
+            <a:avLst/>
+          </a:prstGeom>
+          <a:solidFill>
+            <a:srgbClr val="141C28"/>
+          </a:solidFill>
+          <a:ln w="9525">
+            <a:solidFill>
+              <a:srgbClr val="232C39"/>
+            </a:solidFill>
+          </a:ln>
+          <a:effectLst/>
+        </p:spPr>
+        <p:style>
+          <a:lnRef idx="1">
+            <a:schemeClr val="accent1"/>
+          </a:lnRef>
+          <a:fillRef idx="3">
+            <a:schemeClr val="accent1"/>
+          </a:fillRef>
+          <a:effectRef idx="2">
+            <a:schemeClr val="accent1"/>
+          </a:effectRef>
+          <a:fontRef idx="minor">
+            <a:schemeClr val="lt1"/>
+          </a:fontRef>
+        </p:style>
+        <p:txBody>
+          <a:bodyPr rtlCol="0" anchor="ctr"/>
+          <a:lstStyle/>
+          <a:p>
+            <a:pPr algn="ctr"/>
+          </a:p>
+        </p:txBody>
+      </p:sp>
+      <p:sp>
+        <p:nvSpPr>
+          <p:cNvPr id="35" name="TextBox 34"/>
+          <p:cNvSpPr txBox="1"/>
+          <p:nvPr/>
+        </p:nvSpPr>
+        <p:spPr>
+          <a:xfrm>
+            <a:off x="5687568" y="3611880"/>
+            <a:ext cx="5175504" cy="457200"/>
+          </a:xfrm>
+          <a:prstGeom prst="rect">
+            <a:avLst/>
+          </a:prstGeom>
+          <a:noFill/>
+        </p:spPr>
+        <p:txBody>
+          <a:bodyPr wrap="square" anchor="ctr" lIns="0" rIns="0" tIns="0" bIns="0">
+            <a:spAutoFit/>
+          </a:bodyPr>
+          <a:lstStyle/>
+          <a:p>
+            <a:pPr algn="l">
+              <a:lnSpc>
+                <a:spcPct val="115000"/>
+              </a:lnSpc>
+            </a:pPr>
+            <a:r>
+              <a:rPr sz="1050" b="0" i="0">
+                <a:solidFill>
+                  <a:srgbClr val="93A4B4"/>
+                </a:solidFill>
+                <a:latin typeface="Segoe UI"/>
+              </a:rPr>
+              <a:t>Jacobi 회전 수렴 과정이 터미널에 실시간으로 찍힘</a:t>
+            </a:r>
+          </a:p>
+        </p:txBody>
+      </p:sp>
+      <p:sp>
+        <p:nvSpPr>
+          <p:cNvPr id="36" name="Rectangle 35"/>
+          <p:cNvSpPr/>
+          <p:nvPr/>
+        </p:nvSpPr>
+        <p:spPr>
+          <a:xfrm>
+            <a:off x="457200" y="4069080"/>
+            <a:ext cx="2743200" cy="457200"/>
+          </a:xfrm>
+          <a:prstGeom prst="rect">
+            <a:avLst/>
+          </a:prstGeom>
+          <a:solidFill>
+            <a:srgbClr val="101722"/>
+          </a:solidFill>
+          <a:ln w="9525">
+            <a:solidFill>
+              <a:srgbClr val="232C39"/>
+            </a:solidFill>
+          </a:ln>
+          <a:effectLst/>
+        </p:spPr>
+        <p:style>
+          <a:lnRef idx="1">
+            <a:schemeClr val="accent1"/>
+          </a:lnRef>
+          <a:fillRef idx="3">
+            <a:schemeClr val="accent1"/>
+          </a:fillRef>
+          <a:effectRef idx="2">
+            <a:schemeClr val="accent1"/>
+          </a:effectRef>
+          <a:fontRef idx="minor">
+            <a:schemeClr val="lt1"/>
+          </a:fontRef>
+        </p:style>
+        <p:txBody>
+          <a:bodyPr rtlCol="0" anchor="ctr"/>
+          <a:lstStyle/>
+          <a:p>
+            <a:pPr algn="ctr"/>
+          </a:p>
+        </p:txBody>
+      </p:sp>
+      <p:sp>
+        <p:nvSpPr>
+          <p:cNvPr id="37" name="TextBox 36"/>
+          <p:cNvSpPr txBox="1"/>
+          <p:nvPr/>
+        </p:nvSpPr>
+        <p:spPr>
+          <a:xfrm>
+            <a:off x="566928" y="4069080"/>
+            <a:ext cx="2523744" cy="457200"/>
+          </a:xfrm>
+          <a:prstGeom prst="rect">
+            <a:avLst/>
+          </a:prstGeom>
+          <a:noFill/>
+        </p:spPr>
+        <p:txBody>
+          <a:bodyPr wrap="square" anchor="ctr" lIns="0" rIns="0" tIns="0" bIns="0">
+            <a:spAutoFit/>
+          </a:bodyPr>
+          <a:lstStyle/>
+          <a:p>
+            <a:pPr algn="l">
+              <a:lnSpc>
+                <a:spcPct val="115000"/>
+              </a:lnSpc>
+            </a:pPr>
+            <a:r>
+              <a:rPr sz="1050" b="1" i="0">
+                <a:solidFill>
+                  <a:srgbClr val="E9F0F6"/>
+                </a:solidFill>
+                <a:latin typeface="Consolas"/>
+              </a:rPr>
+              <a:t>클러스터링</a:t>
+            </a:r>
+          </a:p>
+        </p:txBody>
+      </p:sp>
+      <p:sp>
+        <p:nvSpPr>
+          <p:cNvPr id="38" name="Rectangle 37"/>
+          <p:cNvSpPr/>
+          <p:nvPr/>
+        </p:nvSpPr>
+        <p:spPr>
+          <a:xfrm>
+            <a:off x="3200400" y="4069080"/>
+            <a:ext cx="2377440" cy="457200"/>
+          </a:xfrm>
+          <a:prstGeom prst="rect">
+            <a:avLst/>
+          </a:prstGeom>
+          <a:solidFill>
+            <a:srgbClr val="101722"/>
+          </a:solidFill>
+          <a:ln w="9525">
+            <a:solidFill>
+              <a:srgbClr val="232C39"/>
+            </a:solidFill>
+          </a:ln>
+          <a:effectLst/>
+        </p:spPr>
+        <p:style>
+          <a:lnRef idx="1">
+            <a:schemeClr val="accent1"/>
+          </a:lnRef>
+          <a:fillRef idx="3">
+            <a:schemeClr val="accent1"/>
+          </a:fillRef>
+          <a:effectRef idx="2">
+            <a:schemeClr val="accent1"/>
+          </a:effectRef>
+          <a:fontRef idx="minor">
+            <a:schemeClr val="lt1"/>
+          </a:fontRef>
+        </p:style>
+        <p:txBody>
+          <a:bodyPr rtlCol="0" anchor="ctr"/>
+          <a:lstStyle/>
+          <a:p>
+            <a:pPr algn="ctr"/>
+          </a:p>
+        </p:txBody>
+      </p:sp>
+      <p:sp>
+        <p:nvSpPr>
+          <p:cNvPr id="39" name="TextBox 38"/>
+          <p:cNvSpPr txBox="1"/>
+          <p:nvPr/>
+        </p:nvSpPr>
+        <p:spPr>
+          <a:xfrm>
+            <a:off x="3310128" y="4069080"/>
+            <a:ext cx="2157984" cy="457200"/>
+          </a:xfrm>
+          <a:prstGeom prst="rect">
+            <a:avLst/>
+          </a:prstGeom>
+          <a:noFill/>
+        </p:spPr>
+        <p:txBody>
+          <a:bodyPr wrap="square" anchor="ctr" lIns="0" rIns="0" tIns="0" bIns="0">
+            <a:spAutoFit/>
+          </a:bodyPr>
+          <a:lstStyle/>
+          <a:p>
+            <a:pPr algn="l">
+              <a:lnSpc>
+                <a:spcPct val="115000"/>
+              </a:lnSpc>
+            </a:pPr>
+            <a:r>
+              <a:rPr sz="1050" b="0" i="0">
+                <a:solidFill>
+                  <a:srgbClr val="93A4B4"/>
+                </a:solidFill>
+                <a:latin typeface="Consolas"/>
+              </a:rPr>
+              <a:t>04 · STEP 5</a:t>
+            </a:r>
+          </a:p>
+        </p:txBody>
+      </p:sp>
+      <p:sp>
+        <p:nvSpPr>
+          <p:cNvPr id="40" name="Rectangle 39"/>
+          <p:cNvSpPr/>
+          <p:nvPr/>
+        </p:nvSpPr>
+        <p:spPr>
+          <a:xfrm>
+            <a:off x="5577840" y="4069080"/>
+            <a:ext cx="5394960" cy="457200"/>
+          </a:xfrm>
+          <a:prstGeom prst="rect">
+            <a:avLst/>
+          </a:prstGeom>
+          <a:solidFill>
+            <a:srgbClr val="101722"/>
+          </a:solidFill>
+          <a:ln w="9525">
+            <a:solidFill>
+              <a:srgbClr val="232C39"/>
+            </a:solidFill>
+          </a:ln>
+          <a:effectLst/>
+        </p:spPr>
+        <p:style>
+          <a:lnRef idx="1">
+            <a:schemeClr val="accent1"/>
+          </a:lnRef>
+          <a:fillRef idx="3">
+            <a:schemeClr val="accent1"/>
+          </a:fillRef>
+          <a:effectRef idx="2">
+            <a:schemeClr val="accent1"/>
+          </a:effectRef>
+          <a:fontRef idx="minor">
+            <a:schemeClr val="lt1"/>
+          </a:fontRef>
+        </p:style>
+        <p:txBody>
+          <a:bodyPr rtlCol="0" anchor="ctr"/>
+          <a:lstStyle/>
+          <a:p>
+            <a:pPr algn="ctr"/>
+          </a:p>
+        </p:txBody>
+      </p:sp>
+      <p:sp>
+        <p:nvSpPr>
+          <p:cNvPr id="41" name="TextBox 40"/>
+          <p:cNvSpPr txBox="1"/>
+          <p:nvPr/>
+        </p:nvSpPr>
+        <p:spPr>
+          <a:xfrm>
+            <a:off x="5687568" y="4069080"/>
+            <a:ext cx="5175504" cy="457200"/>
+          </a:xfrm>
+          <a:prstGeom prst="rect">
+            <a:avLst/>
+          </a:prstGeom>
+          <a:noFill/>
+        </p:spPr>
+        <p:txBody>
+          <a:bodyPr wrap="square" anchor="ctr" lIns="0" rIns="0" tIns="0" bIns="0">
+            <a:spAutoFit/>
+          </a:bodyPr>
+          <a:lstStyle/>
+          <a:p>
+            <a:pPr algn="l">
+              <a:lnSpc>
+                <a:spcPct val="115000"/>
+              </a:lnSpc>
+            </a:pPr>
+            <a:r>
+              <a:rPr sz="1050" b="0" i="0">
+                <a:solidFill>
+                  <a:srgbClr val="93A4B4"/>
+                </a:solidFill>
+                <a:latin typeface="Segoe UI"/>
+              </a:rPr>
+              <a:t>kNN·resolution 조절 → 터미널의 level별 커뮤니티 수</a:t>
+            </a:r>
+          </a:p>
+        </p:txBody>
+      </p:sp>
+      <p:sp>
+        <p:nvSpPr>
+          <p:cNvPr id="42" name="Rectangle 41"/>
+          <p:cNvSpPr/>
+          <p:nvPr/>
+        </p:nvSpPr>
+        <p:spPr>
+          <a:xfrm>
+            <a:off x="457200" y="4526280"/>
+            <a:ext cx="2743200" cy="457200"/>
+          </a:xfrm>
+          <a:prstGeom prst="rect">
+            <a:avLst/>
+          </a:prstGeom>
+          <a:solidFill>
+            <a:srgbClr val="141C28"/>
+          </a:solidFill>
+          <a:ln w="9525">
+            <a:solidFill>
+              <a:srgbClr val="232C39"/>
+            </a:solidFill>
+          </a:ln>
+          <a:effectLst/>
+        </p:spPr>
+        <p:style>
+          <a:lnRef idx="1">
+            <a:schemeClr val="accent1"/>
+          </a:lnRef>
+          <a:fillRef idx="3">
+            <a:schemeClr val="accent1"/>
+          </a:fillRef>
+          <a:effectRef idx="2">
+            <a:schemeClr val="accent1"/>
+          </a:effectRef>
+          <a:fontRef idx="minor">
+            <a:schemeClr val="lt1"/>
+          </a:fontRef>
+        </p:style>
+        <p:txBody>
+          <a:bodyPr rtlCol="0" anchor="ctr"/>
+          <a:lstStyle/>
+          <a:p>
+            <a:pPr algn="ctr"/>
+          </a:p>
+        </p:txBody>
+      </p:sp>
+      <p:sp>
+        <p:nvSpPr>
+          <p:cNvPr id="43" name="TextBox 42"/>
+          <p:cNvSpPr txBox="1"/>
+          <p:nvPr/>
+        </p:nvSpPr>
+        <p:spPr>
+          <a:xfrm>
+            <a:off x="566928" y="4526280"/>
+            <a:ext cx="2523744" cy="457200"/>
+          </a:xfrm>
+          <a:prstGeom prst="rect">
+            <a:avLst/>
+          </a:prstGeom>
+          <a:noFill/>
+        </p:spPr>
+        <p:txBody>
+          <a:bodyPr wrap="square" anchor="ctr" lIns="0" rIns="0" tIns="0" bIns="0">
+            <a:spAutoFit/>
+          </a:bodyPr>
+          <a:lstStyle/>
+          <a:p>
+            <a:pPr algn="l">
+              <a:lnSpc>
+                <a:spcPct val="115000"/>
+              </a:lnSpc>
+            </a:pPr>
+            <a:r>
+              <a:rPr sz="1050" b="1" i="0">
+                <a:solidFill>
+                  <a:srgbClr val="E9F0F6"/>
+                </a:solidFill>
+                <a:latin typeface="Consolas"/>
+              </a:rPr>
+              <a:t>마커 검정</a:t>
+            </a:r>
+          </a:p>
+        </p:txBody>
+      </p:sp>
+      <p:sp>
+        <p:nvSpPr>
+          <p:cNvPr id="44" name="Rectangle 43"/>
+          <p:cNvSpPr/>
+          <p:nvPr/>
+        </p:nvSpPr>
+        <p:spPr>
+          <a:xfrm>
+            <a:off x="3200400" y="4526280"/>
+            <a:ext cx="2377440" cy="457200"/>
+          </a:xfrm>
+          <a:prstGeom prst="rect">
+            <a:avLst/>
+          </a:prstGeom>
+          <a:solidFill>
+            <a:srgbClr val="141C28"/>
+          </a:solidFill>
+          <a:ln w="9525">
+            <a:solidFill>
+              <a:srgbClr val="232C39"/>
+            </a:solidFill>
+          </a:ln>
+          <a:effectLst/>
+        </p:spPr>
+        <p:style>
+          <a:lnRef idx="1">
+            <a:schemeClr val="accent1"/>
+          </a:lnRef>
+          <a:fillRef idx="3">
+            <a:schemeClr val="accent1"/>
+          </a:fillRef>
+          <a:effectRef idx="2">
+            <a:schemeClr val="accent1"/>
+          </a:effectRef>
+          <a:fontRef idx="minor">
+            <a:schemeClr val="lt1"/>
+          </a:fontRef>
+        </p:style>
+        <p:txBody>
+          <a:bodyPr rtlCol="0" anchor="ctr"/>
+          <a:lstStyle/>
+          <a:p>
+            <a:pPr algn="ctr"/>
+          </a:p>
+        </p:txBody>
+      </p:sp>
+      <p:sp>
+        <p:nvSpPr>
+          <p:cNvPr id="45" name="TextBox 44"/>
+          <p:cNvSpPr txBox="1"/>
+          <p:nvPr/>
+        </p:nvSpPr>
+        <p:spPr>
+          <a:xfrm>
+            <a:off x="3310128" y="4526280"/>
+            <a:ext cx="2157984" cy="457200"/>
+          </a:xfrm>
+          <a:prstGeom prst="rect">
+            <a:avLst/>
+          </a:prstGeom>
+          <a:noFill/>
+        </p:spPr>
+        <p:txBody>
+          <a:bodyPr wrap="square" anchor="ctr" lIns="0" rIns="0" tIns="0" bIns="0">
+            <a:spAutoFit/>
+          </a:bodyPr>
+          <a:lstStyle/>
+          <a:p>
+            <a:pPr algn="l">
+              <a:lnSpc>
+                <a:spcPct val="115000"/>
+              </a:lnSpc>
+            </a:pPr>
+            <a:r>
+              <a:rPr sz="1050" b="0" i="0">
+                <a:solidFill>
+                  <a:srgbClr val="93A4B4"/>
+                </a:solidFill>
+                <a:latin typeface="Consolas"/>
+              </a:rPr>
+              <a:t>04 · STEP 6</a:t>
+            </a:r>
+          </a:p>
+        </p:txBody>
+      </p:sp>
+      <p:sp>
+        <p:nvSpPr>
+          <p:cNvPr id="46" name="Rectangle 45"/>
+          <p:cNvSpPr/>
+          <p:nvPr/>
+        </p:nvSpPr>
+        <p:spPr>
+          <a:xfrm>
+            <a:off x="5577840" y="4526280"/>
+            <a:ext cx="5394960" cy="457200"/>
+          </a:xfrm>
+          <a:prstGeom prst="rect">
+            <a:avLst/>
+          </a:prstGeom>
+          <a:solidFill>
+            <a:srgbClr val="141C28"/>
+          </a:solidFill>
+          <a:ln w="9525">
+            <a:solidFill>
+              <a:srgbClr val="232C39"/>
+            </a:solidFill>
+          </a:ln>
+          <a:effectLst/>
+        </p:spPr>
+        <p:style>
+          <a:lnRef idx="1">
+            <a:schemeClr val="accent1"/>
+          </a:lnRef>
+          <a:fillRef idx="3">
+            <a:schemeClr val="accent1"/>
+          </a:fillRef>
+          <a:effectRef idx="2">
+            <a:schemeClr val="accent1"/>
+          </a:effectRef>
+          <a:fontRef idx="minor">
+            <a:schemeClr val="lt1"/>
+          </a:fontRef>
+        </p:style>
+        <p:txBody>
+          <a:bodyPr rtlCol="0" anchor="ctr"/>
+          <a:lstStyle/>
+          <a:p>
+            <a:pPr algn="ctr"/>
+          </a:p>
+        </p:txBody>
+      </p:sp>
+      <p:sp>
+        <p:nvSpPr>
+          <p:cNvPr id="47" name="TextBox 46"/>
+          <p:cNvSpPr txBox="1"/>
+          <p:nvPr/>
+        </p:nvSpPr>
+        <p:spPr>
+          <a:xfrm>
+            <a:off x="5687568" y="4526280"/>
+            <a:ext cx="5175504" cy="457200"/>
+          </a:xfrm>
+          <a:prstGeom prst="rect">
+            <a:avLst/>
+          </a:prstGeom>
+          <a:noFill/>
+        </p:spPr>
+        <p:txBody>
+          <a:bodyPr wrap="square" anchor="ctr" lIns="0" rIns="0" tIns="0" bIns="0">
+            <a:spAutoFit/>
+          </a:bodyPr>
+          <a:lstStyle/>
+          <a:p>
+            <a:pPr algn="l">
+              <a:lnSpc>
+                <a:spcPct val="115000"/>
+              </a:lnSpc>
+            </a:pPr>
+            <a:r>
+              <a:rPr sz="1050" b="0" i="0">
+                <a:solidFill>
+                  <a:srgbClr val="93A4B4"/>
+                </a:solidFill>
+                <a:latin typeface="Segoe UI"/>
+              </a:rPr>
+              <a:t>dot plot의 padj 값, 클러스터별 Wilcoxon 로그</a:t>
+            </a:r>
+          </a:p>
+        </p:txBody>
+      </p:sp>
+      <p:sp>
+        <p:nvSpPr>
+          <p:cNvPr id="48" name="Rectangle 47"/>
+          <p:cNvSpPr/>
+          <p:nvPr/>
+        </p:nvSpPr>
+        <p:spPr>
+          <a:xfrm>
+            <a:off x="457200" y="4983480"/>
+            <a:ext cx="2743200" cy="457200"/>
+          </a:xfrm>
+          <a:prstGeom prst="rect">
+            <a:avLst/>
+          </a:prstGeom>
+          <a:solidFill>
+            <a:srgbClr val="101722"/>
+          </a:solidFill>
+          <a:ln w="9525">
+            <a:solidFill>
+              <a:srgbClr val="232C39"/>
+            </a:solidFill>
+          </a:ln>
+          <a:effectLst/>
+        </p:spPr>
+        <p:style>
+          <a:lnRef idx="1">
+            <a:schemeClr val="accent1"/>
+          </a:lnRef>
+          <a:fillRef idx="3">
+            <a:schemeClr val="accent1"/>
+          </a:fillRef>
+          <a:effectRef idx="2">
+            <a:schemeClr val="accent1"/>
+          </a:effectRef>
+          <a:fontRef idx="minor">
+            <a:schemeClr val="lt1"/>
+          </a:fontRef>
+        </p:style>
+        <p:txBody>
+          <a:bodyPr rtlCol="0" anchor="ctr"/>
+          <a:lstStyle/>
+          <a:p>
+            <a:pPr algn="ctr"/>
+          </a:p>
+        </p:txBody>
+      </p:sp>
+      <p:sp>
+        <p:nvSpPr>
+          <p:cNvPr id="49" name="TextBox 48"/>
+          <p:cNvSpPr txBox="1"/>
+          <p:nvPr/>
+        </p:nvSpPr>
+        <p:spPr>
+          <a:xfrm>
+            <a:off x="566928" y="4983480"/>
+            <a:ext cx="2523744" cy="457200"/>
+          </a:xfrm>
+          <a:prstGeom prst="rect">
+            <a:avLst/>
+          </a:prstGeom>
+          <a:noFill/>
+        </p:spPr>
+        <p:txBody>
+          <a:bodyPr wrap="square" anchor="ctr" lIns="0" rIns="0" tIns="0" bIns="0">
+            <a:spAutoFit/>
+          </a:bodyPr>
+          <a:lstStyle/>
+          <a:p>
+            <a:pPr algn="l">
+              <a:lnSpc>
+                <a:spcPct val="115000"/>
+              </a:lnSpc>
+            </a:pPr>
+            <a:r>
+              <a:rPr sz="1050" b="1" i="0">
+                <a:solidFill>
+                  <a:srgbClr val="E9F0F6"/>
+                </a:solidFill>
+                <a:latin typeface="Consolas"/>
+              </a:rPr>
+              <a:t>Cell type annotation</a:t>
+            </a:r>
+          </a:p>
+        </p:txBody>
+      </p:sp>
+      <p:sp>
+        <p:nvSpPr>
+          <p:cNvPr id="50" name="Rectangle 49"/>
+          <p:cNvSpPr/>
+          <p:nvPr/>
+        </p:nvSpPr>
+        <p:spPr>
+          <a:xfrm>
+            <a:off x="3200400" y="4983480"/>
+            <a:ext cx="2377440" cy="457200"/>
+          </a:xfrm>
+          <a:prstGeom prst="rect">
+            <a:avLst/>
+          </a:prstGeom>
+          <a:solidFill>
+            <a:srgbClr val="101722"/>
+          </a:solidFill>
+          <a:ln w="9525">
+            <a:solidFill>
+              <a:srgbClr val="232C39"/>
+            </a:solidFill>
+          </a:ln>
+          <a:effectLst/>
+        </p:spPr>
+        <p:style>
+          <a:lnRef idx="1">
+            <a:schemeClr val="accent1"/>
+          </a:lnRef>
+          <a:fillRef idx="3">
+            <a:schemeClr val="accent1"/>
+          </a:fillRef>
+          <a:effectRef idx="2">
+            <a:schemeClr val="accent1"/>
+          </a:effectRef>
+          <a:fontRef idx="minor">
+            <a:schemeClr val="lt1"/>
+          </a:fontRef>
+        </p:style>
+        <p:txBody>
+          <a:bodyPr rtlCol="0" anchor="ctr"/>
+          <a:lstStyle/>
+          <a:p>
+            <a:pPr algn="ctr"/>
+          </a:p>
+        </p:txBody>
+      </p:sp>
+      <p:sp>
+        <p:nvSpPr>
+          <p:cNvPr id="51" name="TextBox 50"/>
+          <p:cNvSpPr txBox="1"/>
+          <p:nvPr/>
+        </p:nvSpPr>
+        <p:spPr>
+          <a:xfrm>
+            <a:off x="3310128" y="4983480"/>
+            <a:ext cx="2157984" cy="457200"/>
+          </a:xfrm>
+          <a:prstGeom prst="rect">
+            <a:avLst/>
+          </a:prstGeom>
+          <a:noFill/>
+        </p:spPr>
+        <p:txBody>
+          <a:bodyPr wrap="square" anchor="ctr" lIns="0" rIns="0" tIns="0" bIns="0">
+            <a:spAutoFit/>
+          </a:bodyPr>
+          <a:lstStyle/>
+          <a:p>
+            <a:pPr algn="l">
+              <a:lnSpc>
+                <a:spcPct val="115000"/>
+              </a:lnSpc>
+            </a:pPr>
+            <a:r>
+              <a:rPr sz="1050" b="0" i="0">
+                <a:solidFill>
+                  <a:srgbClr val="93A4B4"/>
+                </a:solidFill>
+                <a:latin typeface="Consolas"/>
+              </a:rPr>
+              <a:t>05 탭</a:t>
+            </a:r>
+          </a:p>
+        </p:txBody>
+      </p:sp>
+      <p:sp>
+        <p:nvSpPr>
+          <p:cNvPr id="52" name="Rectangle 51"/>
+          <p:cNvSpPr/>
+          <p:nvPr/>
+        </p:nvSpPr>
+        <p:spPr>
+          <a:xfrm>
+            <a:off x="5577840" y="4983480"/>
+            <a:ext cx="5394960" cy="457200"/>
+          </a:xfrm>
+          <a:prstGeom prst="rect">
+            <a:avLst/>
+          </a:prstGeom>
+          <a:solidFill>
+            <a:srgbClr val="101722"/>
+          </a:solidFill>
+          <a:ln w="9525">
+            <a:solidFill>
+              <a:srgbClr val="232C39"/>
+            </a:solidFill>
+          </a:ln>
+          <a:effectLst/>
+        </p:spPr>
+        <p:style>
+          <a:lnRef idx="1">
+            <a:schemeClr val="accent1"/>
+          </a:lnRef>
+          <a:fillRef idx="3">
+            <a:schemeClr val="accent1"/>
+          </a:fillRef>
+          <a:effectRef idx="2">
+            <a:schemeClr val="accent1"/>
+          </a:effectRef>
+          <a:fontRef idx="minor">
+            <a:schemeClr val="lt1"/>
+          </a:fontRef>
+        </p:style>
+        <p:txBody>
+          <a:bodyPr rtlCol="0" anchor="ctr"/>
+          <a:lstStyle/>
+          <a:p>
+            <a:pPr algn="ctr"/>
+          </a:p>
+        </p:txBody>
+      </p:sp>
+      <p:sp>
+        <p:nvSpPr>
+          <p:cNvPr id="53" name="TextBox 52"/>
+          <p:cNvSpPr txBox="1"/>
+          <p:nvPr/>
+        </p:nvSpPr>
+        <p:spPr>
+          <a:xfrm>
+            <a:off x="5687568" y="4983480"/>
+            <a:ext cx="5175504" cy="457200"/>
+          </a:xfrm>
+          <a:prstGeom prst="rect">
+            <a:avLst/>
+          </a:prstGeom>
+          <a:noFill/>
+        </p:spPr>
+        <p:txBody>
+          <a:bodyPr wrap="square" anchor="ctr" lIns="0" rIns="0" tIns="0" bIns="0">
+            <a:spAutoFit/>
+          </a:bodyPr>
+          <a:lstStyle/>
+          <a:p>
+            <a:pPr algn="l">
+              <a:lnSpc>
+                <a:spcPct val="115000"/>
+              </a:lnSpc>
+            </a:pPr>
+            <a:r>
+              <a:rPr sz="1050" b="0" i="0">
+                <a:solidFill>
+                  <a:srgbClr val="93A4B4"/>
+                </a:solidFill>
+                <a:latin typeface="Segoe UI"/>
+              </a:rPr>
+              <a:t>마커 증거 카드 + 세포 유형 가설 선택</a:t>
+            </a:r>
+          </a:p>
+        </p:txBody>
+      </p:sp>
+      <p:sp>
+        <p:nvSpPr>
+          <p:cNvPr id="54" name="Rectangle 53"/>
+          <p:cNvSpPr/>
+          <p:nvPr/>
+        </p:nvSpPr>
+        <p:spPr>
+          <a:xfrm>
+            <a:off x="457200" y="5440680"/>
+            <a:ext cx="2743200" cy="457200"/>
+          </a:xfrm>
+          <a:prstGeom prst="rect">
+            <a:avLst/>
+          </a:prstGeom>
+          <a:solidFill>
+            <a:srgbClr val="141C28"/>
+          </a:solidFill>
+          <a:ln w="9525">
+            <a:solidFill>
+              <a:srgbClr val="232C39"/>
+            </a:solidFill>
+          </a:ln>
+          <a:effectLst/>
+        </p:spPr>
+        <p:style>
+          <a:lnRef idx="1">
+            <a:schemeClr val="accent1"/>
+          </a:lnRef>
+          <a:fillRef idx="3">
+            <a:schemeClr val="accent1"/>
+          </a:fillRef>
+          <a:effectRef idx="2">
+            <a:schemeClr val="accent1"/>
+          </a:effectRef>
+          <a:fontRef idx="minor">
+            <a:schemeClr val="lt1"/>
+          </a:fontRef>
+        </p:style>
+        <p:txBody>
+          <a:bodyPr rtlCol="0" anchor="ctr"/>
+          <a:lstStyle/>
+          <a:p>
+            <a:pPr algn="ctr"/>
+          </a:p>
+        </p:txBody>
+      </p:sp>
+      <p:sp>
+        <p:nvSpPr>
+          <p:cNvPr id="55" name="TextBox 54"/>
+          <p:cNvSpPr txBox="1"/>
+          <p:nvPr/>
+        </p:nvSpPr>
+        <p:spPr>
+          <a:xfrm>
+            <a:off x="566928" y="5440680"/>
+            <a:ext cx="2523744" cy="457200"/>
+          </a:xfrm>
+          <a:prstGeom prst="rect">
+            <a:avLst/>
+          </a:prstGeom>
+          <a:noFill/>
+        </p:spPr>
+        <p:txBody>
+          <a:bodyPr wrap="square" anchor="ctr" lIns="0" rIns="0" tIns="0" bIns="0">
+            <a:spAutoFit/>
+          </a:bodyPr>
+          <a:lstStyle/>
+          <a:p>
+            <a:pPr algn="l">
+              <a:lnSpc>
+                <a:spcPct val="115000"/>
+              </a:lnSpc>
+            </a:pPr>
+            <a:r>
+              <a:rPr sz="1050" b="1" i="0">
+                <a:solidFill>
+                  <a:srgbClr val="E9F0F6"/>
+                </a:solidFill>
+                <a:latin typeface="Consolas"/>
+              </a:rPr>
+              <a:t>Downstream 질문</a:t>
+            </a:r>
+          </a:p>
+        </p:txBody>
+      </p:sp>
+      <p:sp>
+        <p:nvSpPr>
+          <p:cNvPr id="56" name="Rectangle 55"/>
+          <p:cNvSpPr/>
+          <p:nvPr/>
+        </p:nvSpPr>
+        <p:spPr>
+          <a:xfrm>
+            <a:off x="3200400" y="5440680"/>
+            <a:ext cx="2377440" cy="457200"/>
+          </a:xfrm>
+          <a:prstGeom prst="rect">
+            <a:avLst/>
+          </a:prstGeom>
+          <a:solidFill>
+            <a:srgbClr val="141C28"/>
+          </a:solidFill>
+          <a:ln w="9525">
+            <a:solidFill>
+              <a:srgbClr val="232C39"/>
+            </a:solidFill>
+          </a:ln>
+          <a:effectLst/>
+        </p:spPr>
+        <p:style>
+          <a:lnRef idx="1">
+            <a:schemeClr val="accent1"/>
+          </a:lnRef>
+          <a:fillRef idx="3">
+            <a:schemeClr val="accent1"/>
+          </a:fillRef>
+          <a:effectRef idx="2">
+            <a:schemeClr val="accent1"/>
+          </a:effectRef>
+          <a:fontRef idx="minor">
+            <a:schemeClr val="lt1"/>
+          </a:fontRef>
+        </p:style>
+        <p:txBody>
+          <a:bodyPr rtlCol="0" anchor="ctr"/>
+          <a:lstStyle/>
+          <a:p>
+            <a:pPr algn="ctr"/>
+          </a:p>
+        </p:txBody>
+      </p:sp>
+      <p:sp>
+        <p:nvSpPr>
+          <p:cNvPr id="57" name="TextBox 56"/>
+          <p:cNvSpPr txBox="1"/>
+          <p:nvPr/>
+        </p:nvSpPr>
+        <p:spPr>
+          <a:xfrm>
+            <a:off x="3310128" y="5440680"/>
+            <a:ext cx="2157984" cy="457200"/>
+          </a:xfrm>
+          <a:prstGeom prst="rect">
+            <a:avLst/>
+          </a:prstGeom>
+          <a:noFill/>
+        </p:spPr>
+        <p:txBody>
+          <a:bodyPr wrap="square" anchor="ctr" lIns="0" rIns="0" tIns="0" bIns="0">
+            <a:spAutoFit/>
+          </a:bodyPr>
+          <a:lstStyle/>
+          <a:p>
+            <a:pPr algn="l">
+              <a:lnSpc>
+                <a:spcPct val="115000"/>
+              </a:lnSpc>
+            </a:pPr>
+            <a:r>
+              <a:rPr sz="1050" b="0" i="0">
+                <a:solidFill>
+                  <a:srgbClr val="93A4B4"/>
+                </a:solidFill>
+                <a:latin typeface="Consolas"/>
+              </a:rPr>
+              <a:t>06 탭</a:t>
+            </a:r>
+          </a:p>
+        </p:txBody>
+      </p:sp>
+      <p:sp>
+        <p:nvSpPr>
+          <p:cNvPr id="58" name="Rectangle 57"/>
+          <p:cNvSpPr/>
+          <p:nvPr/>
+        </p:nvSpPr>
+        <p:spPr>
+          <a:xfrm>
+            <a:off x="5577840" y="5440680"/>
+            <a:ext cx="5394960" cy="457200"/>
+          </a:xfrm>
+          <a:prstGeom prst="rect">
+            <a:avLst/>
+          </a:prstGeom>
+          <a:solidFill>
+            <a:srgbClr val="141C28"/>
+          </a:solidFill>
+          <a:ln w="9525">
+            <a:solidFill>
+              <a:srgbClr val="232C39"/>
+            </a:solidFill>
+          </a:ln>
+          <a:effectLst/>
+        </p:spPr>
+        <p:style>
+          <a:lnRef idx="1">
+            <a:schemeClr val="accent1"/>
+          </a:lnRef>
+          <a:fillRef idx="3">
+            <a:schemeClr val="accent1"/>
+          </a:fillRef>
+          <a:effectRef idx="2">
+            <a:schemeClr val="accent1"/>
+          </a:effectRef>
+          <a:fontRef idx="minor">
+            <a:schemeClr val="lt1"/>
+          </a:fontRef>
+        </p:style>
+        <p:txBody>
+          <a:bodyPr rtlCol="0" anchor="ctr"/>
+          <a:lstStyle/>
+          <a:p>
+            <a:pPr algn="ctr"/>
+          </a:p>
+        </p:txBody>
+      </p:sp>
+      <p:sp>
+        <p:nvSpPr>
+          <p:cNvPr id="59" name="TextBox 58"/>
+          <p:cNvSpPr txBox="1"/>
+          <p:nvPr/>
+        </p:nvSpPr>
+        <p:spPr>
+          <a:xfrm>
+            <a:off x="5687568" y="5440680"/>
+            <a:ext cx="5175504" cy="457200"/>
+          </a:xfrm>
+          <a:prstGeom prst="rect">
+            <a:avLst/>
+          </a:prstGeom>
+          <a:noFill/>
+        </p:spPr>
+        <p:txBody>
+          <a:bodyPr wrap="square" anchor="ctr" lIns="0" rIns="0" tIns="0" bIns="0">
+            <a:spAutoFit/>
+          </a:bodyPr>
+          <a:lstStyle/>
+          <a:p>
+            <a:pPr algn="l">
+              <a:lnSpc>
+                <a:spcPct val="115000"/>
+              </a:lnSpc>
+            </a:pPr>
+            <a:r>
+              <a:rPr sz="1050" b="0" i="0">
+                <a:solidFill>
+                  <a:srgbClr val="93A4B4"/>
+                </a:solidFill>
+                <a:latin typeface="Segoe UI"/>
+              </a:rPr>
+              <a:t>heatmap · composition · similarity 중 선택해 비교</a:t>
+            </a:r>
+          </a:p>
+        </p:txBody>
+      </p:sp>
+      <p:sp>
+        <p:nvSpPr>
+          <p:cNvPr id="60" name="Rectangle 59"/>
+          <p:cNvSpPr/>
+          <p:nvPr/>
+        </p:nvSpPr>
+        <p:spPr>
+          <a:xfrm>
+            <a:off x="457200" y="5897880"/>
+            <a:ext cx="2743200" cy="457200"/>
+          </a:xfrm>
+          <a:prstGeom prst="rect">
+            <a:avLst/>
+          </a:prstGeom>
+          <a:solidFill>
+            <a:srgbClr val="101722"/>
+          </a:solidFill>
+          <a:ln w="9525">
+            <a:solidFill>
+              <a:srgbClr val="232C39"/>
+            </a:solidFill>
+          </a:ln>
+          <a:effectLst/>
+        </p:spPr>
+        <p:style>
+          <a:lnRef idx="1">
+            <a:schemeClr val="accent1"/>
+          </a:lnRef>
+          <a:fillRef idx="3">
+            <a:schemeClr val="accent1"/>
+          </a:fillRef>
+          <a:effectRef idx="2">
+            <a:schemeClr val="accent1"/>
+          </a:effectRef>
+          <a:fontRef idx="minor">
+            <a:schemeClr val="lt1"/>
+          </a:fontRef>
+        </p:style>
+        <p:txBody>
+          <a:bodyPr rtlCol="0" anchor="ctr"/>
+          <a:lstStyle/>
+          <a:p>
+            <a:pPr algn="ctr"/>
+          </a:p>
+        </p:txBody>
+      </p:sp>
+      <p:sp>
+        <p:nvSpPr>
+          <p:cNvPr id="61" name="TextBox 60"/>
+          <p:cNvSpPr txBox="1"/>
+          <p:nvPr/>
+        </p:nvSpPr>
+        <p:spPr>
+          <a:xfrm>
+            <a:off x="566928" y="5897880"/>
+            <a:ext cx="2523744" cy="457200"/>
+          </a:xfrm>
+          <a:prstGeom prst="rect">
+            <a:avLst/>
+          </a:prstGeom>
+          <a:noFill/>
+        </p:spPr>
+        <p:txBody>
+          <a:bodyPr wrap="square" anchor="ctr" lIns="0" rIns="0" tIns="0" bIns="0">
+            <a:spAutoFit/>
+          </a:bodyPr>
+          <a:lstStyle/>
+          <a:p>
+            <a:pPr algn="l">
+              <a:lnSpc>
+                <a:spcPct val="115000"/>
+              </a:lnSpc>
+            </a:pPr>
+            <a:r>
+              <a:rPr sz="1050" b="1" i="0">
+                <a:solidFill>
+                  <a:srgbClr val="E9F0F6"/>
+                </a:solidFill>
+                <a:latin typeface="Consolas"/>
+              </a:rPr>
+              <a:t>Pseudotime + PAGA</a:t>
+            </a:r>
+          </a:p>
+        </p:txBody>
+      </p:sp>
+      <p:sp>
+        <p:nvSpPr>
+          <p:cNvPr id="62" name="Rectangle 61"/>
+          <p:cNvSpPr/>
+          <p:nvPr/>
+        </p:nvSpPr>
+        <p:spPr>
+          <a:xfrm>
+            <a:off x="3200400" y="5897880"/>
+            <a:ext cx="2377440" cy="457200"/>
+          </a:xfrm>
+          <a:prstGeom prst="rect">
+            <a:avLst/>
+          </a:prstGeom>
+          <a:solidFill>
+            <a:srgbClr val="101722"/>
+          </a:solidFill>
+          <a:ln w="9525">
+            <a:solidFill>
+              <a:srgbClr val="232C39"/>
+            </a:solidFill>
+          </a:ln>
+          <a:effectLst/>
+        </p:spPr>
+        <p:style>
+          <a:lnRef idx="1">
+            <a:schemeClr val="accent1"/>
+          </a:lnRef>
+          <a:fillRef idx="3">
+            <a:schemeClr val="accent1"/>
+          </a:fillRef>
+          <a:effectRef idx="2">
+            <a:schemeClr val="accent1"/>
+          </a:effectRef>
+          <a:fontRef idx="minor">
+            <a:schemeClr val="lt1"/>
+          </a:fontRef>
+        </p:style>
+        <p:txBody>
+          <a:bodyPr rtlCol="0" anchor="ctr"/>
+          <a:lstStyle/>
+          <a:p>
+            <a:pPr algn="ctr"/>
+          </a:p>
+        </p:txBody>
+      </p:sp>
+      <p:sp>
+        <p:nvSpPr>
+          <p:cNvPr id="63" name="TextBox 62"/>
+          <p:cNvSpPr txBox="1"/>
+          <p:nvPr/>
+        </p:nvSpPr>
+        <p:spPr>
+          <a:xfrm>
+            <a:off x="3310128" y="5897880"/>
+            <a:ext cx="2157984" cy="457200"/>
+          </a:xfrm>
+          <a:prstGeom prst="rect">
+            <a:avLst/>
+          </a:prstGeom>
+          <a:noFill/>
+        </p:spPr>
+        <p:txBody>
+          <a:bodyPr wrap="square" anchor="ctr" lIns="0" rIns="0" tIns="0" bIns="0">
+            <a:spAutoFit/>
+          </a:bodyPr>
+          <a:lstStyle/>
+          <a:p>
+            <a:pPr algn="l">
+              <a:lnSpc>
+                <a:spcPct val="115000"/>
+              </a:lnSpc>
+            </a:pPr>
+            <a:r>
+              <a:rPr sz="1050" b="0" i="0">
+                <a:solidFill>
+                  <a:srgbClr val="93A4B4"/>
+                </a:solidFill>
+                <a:latin typeface="Consolas"/>
+              </a:rPr>
+              <a:t>07 탭</a:t>
+            </a:r>
+          </a:p>
+        </p:txBody>
+      </p:sp>
+      <p:sp>
+        <p:nvSpPr>
+          <p:cNvPr id="64" name="Rectangle 63"/>
+          <p:cNvSpPr/>
+          <p:nvPr/>
+        </p:nvSpPr>
+        <p:spPr>
+          <a:xfrm>
+            <a:off x="5577840" y="5897880"/>
+            <a:ext cx="5394960" cy="457200"/>
+          </a:xfrm>
+          <a:prstGeom prst="rect">
+            <a:avLst/>
+          </a:prstGeom>
+          <a:solidFill>
+            <a:srgbClr val="101722"/>
+          </a:solidFill>
+          <a:ln w="9525">
+            <a:solidFill>
+              <a:srgbClr val="232C39"/>
+            </a:solidFill>
+          </a:ln>
+          <a:effectLst/>
+        </p:spPr>
+        <p:style>
+          <a:lnRef idx="1">
+            <a:schemeClr val="accent1"/>
+          </a:lnRef>
+          <a:fillRef idx="3">
+            <a:schemeClr val="accent1"/>
+          </a:fillRef>
+          <a:effectRef idx="2">
+            <a:schemeClr val="accent1"/>
+          </a:effectRef>
+          <a:fontRef idx="minor">
+            <a:schemeClr val="lt1"/>
+          </a:fontRef>
+        </p:style>
+        <p:txBody>
+          <a:bodyPr rtlCol="0" anchor="ctr"/>
+          <a:lstStyle/>
+          <a:p>
+            <a:pPr algn="ctr"/>
+          </a:p>
+        </p:txBody>
+      </p:sp>
+      <p:sp>
+        <p:nvSpPr>
+          <p:cNvPr id="65" name="TextBox 64"/>
+          <p:cNvSpPr txBox="1"/>
+          <p:nvPr/>
+        </p:nvSpPr>
+        <p:spPr>
+          <a:xfrm>
+            <a:off x="5687568" y="5897880"/>
+            <a:ext cx="5175504" cy="457200"/>
+          </a:xfrm>
+          <a:prstGeom prst="rect">
+            <a:avLst/>
+          </a:prstGeom>
+          <a:noFill/>
+        </p:spPr>
+        <p:txBody>
+          <a:bodyPr wrap="square" anchor="ctr" lIns="0" rIns="0" tIns="0" bIns="0">
+            <a:spAutoFit/>
+          </a:bodyPr>
+          <a:lstStyle/>
+          <a:p>
+            <a:pPr algn="l">
+              <a:lnSpc>
+                <a:spcPct val="115000"/>
+              </a:lnSpc>
+            </a:pPr>
+            <a:r>
+              <a:rPr sz="1050" b="0" i="0">
+                <a:solidFill>
+                  <a:srgbClr val="93A4B4"/>
+                </a:solidFill>
+                <a:latin typeface="Segoe UI"/>
+              </a:rPr>
+              <a:t>root cluster 선택 → 실제 MST 기반 pseudotime, 연결 그래프, gene trend</a:t>
+            </a:r>
+          </a:p>
+        </p:txBody>
+      </p:sp>
+      <p:sp>
+        <p:nvSpPr>
+          <p:cNvPr id="66" name="TextBox 65"/>
+          <p:cNvSpPr txBox="1"/>
+          <p:nvPr/>
+        </p:nvSpPr>
+        <p:spPr>
+          <a:xfrm>
+            <a:off x="10698480" y="6473952"/>
+            <a:ext cx="1280160" cy="274320"/>
+          </a:xfrm>
+          <a:prstGeom prst="rect">
+            <a:avLst/>
+          </a:prstGeom>
+          <a:noFill/>
+        </p:spPr>
+        <p:txBody>
+          <a:bodyPr wrap="square" anchor="t" lIns="0" rIns="0" tIns="0" bIns="0">
+            <a:spAutoFit/>
+          </a:bodyPr>
+          <a:lstStyle/>
+          <a:p>
+            <a:pPr algn="r">
+              <a:lnSpc>
+                <a:spcPct val="115000"/>
+              </a:lnSpc>
+            </a:pPr>
+            <a:r>
+              <a:rPr sz="1000" b="0" i="0">
+                <a:solidFill>
+                  <a:srgbClr val="6F8090"/>
+                </a:solidFill>
+                <a:latin typeface="Consolas"/>
+              </a:rPr>
+              <a:t>26</a:t>
+            </a:r>
+          </a:p>
+        </p:txBody>
+      </p:sp>
+      <p:sp>
+        <p:nvSpPr>
+          <p:cNvPr id="67" name="TextBox 66"/>
+          <p:cNvSpPr txBox="1"/>
+          <p:nvPr/>
+        </p:nvSpPr>
+        <p:spPr>
+          <a:xfrm>
+            <a:off x="457200" y="6473952"/>
+            <a:ext cx="3657600" cy="274320"/>
+          </a:xfrm>
+          <a:prstGeom prst="rect">
+            <a:avLst/>
+          </a:prstGeom>
+          <a:noFill/>
+        </p:spPr>
+        <p:txBody>
+          <a:bodyPr wrap="square" anchor="t" lIns="0" rIns="0" tIns="0" bIns="0">
+            <a:spAutoFit/>
+          </a:bodyPr>
+          <a:lstStyle/>
+          <a:p>
+            <a:pPr algn="l">
+              <a:lnSpc>
+                <a:spcPct val="115000"/>
+              </a:lnSpc>
+            </a:pPr>
+            <a:r>
+              <a:rPr sz="1000" b="0" i="0">
+                <a:solidFill>
+                  <a:srgbClr val="6F8090"/>
+                </a:solidFill>
+                <a:latin typeface="Consolas"/>
+              </a:rPr>
+              <a:t>Cyto/Seq Console</a:t>
+            </a:r>
+          </a:p>
+        </p:txBody>
+      </p:sp>
+    </p:spTree>
+  </p:cSld>
+  <p:clrMapOvr>
+    <a:masterClrMapping/>
+  </p:clrMapOvr>
+</p:sld>
+</file>
+
+<file path=ppt/slides/slide27.xml><?xml version="1.0" encoding="utf-8"?>
+<p:sld xmlns:a="http://schemas.openxmlformats.org/drawingml/2006/main" xmlns:p="http://schemas.openxmlformats.org/presentationml/2006/main" xmlns:r="http://schemas.openxmlformats.org/officeDocument/2006/relationships">
+  <p:cSld>
+    <p:spTree>
+      <p:nvGrpSpPr>
+        <p:cNvPr id="1" name=""/>
+        <p:cNvGrpSpPr/>
+        <p:nvPr/>
+      </p:nvGrpSpPr>
+      <p:grpSpPr/>
+      <p:sp>
+        <p:nvSpPr>
+          <p:cNvPr id="2" name="Rectangle 1"/>
+          <p:cNvSpPr/>
+          <p:nvPr/>
+        </p:nvSpPr>
+        <p:spPr>
+          <a:xfrm>
+            <a:off x="0" y="0"/>
+            <a:ext cx="12191695" cy="6858000"/>
+          </a:xfrm>
+          <a:prstGeom prst="rect">
+            <a:avLst/>
+          </a:prstGeom>
+          <a:solidFill>
+            <a:srgbClr val="101722"/>
+          </a:solidFill>
+          <a:ln>
+            <a:noFill/>
+          </a:ln>
+          <a:effectLst/>
+        </p:spPr>
+        <p:style>
+          <a:lnRef idx="1">
+            <a:schemeClr val="accent1"/>
+          </a:lnRef>
+          <a:fillRef idx="3">
+            <a:schemeClr val="accent1"/>
+          </a:fillRef>
+          <a:effectRef idx="2">
+            <a:schemeClr val="accent1"/>
+          </a:effectRef>
+          <a:fontRef idx="minor">
+            <a:schemeClr val="lt1"/>
+          </a:fontRef>
+        </p:style>
+        <p:txBody>
+          <a:bodyPr rtlCol="0" anchor="ctr"/>
+          <a:lstStyle/>
+          <a:p>
+            <a:pPr algn="ctr"/>
+          </a:p>
+        </p:txBody>
+      </p:sp>
+      <p:sp>
+        <p:nvSpPr>
+          <p:cNvPr id="3" name="TextBox 2"/>
+          <p:cNvSpPr txBox="1"/>
+          <p:nvPr/>
+        </p:nvSpPr>
+        <p:spPr>
+          <a:xfrm>
+            <a:off x="457200" y="384048"/>
+            <a:ext cx="7315200" cy="320040"/>
+          </a:xfrm>
+          <a:prstGeom prst="rect">
+            <a:avLst/>
+          </a:prstGeom>
+          <a:noFill/>
+        </p:spPr>
+        <p:txBody>
+          <a:bodyPr wrap="square" anchor="t" lIns="0" rIns="0" tIns="0" bIns="0">
+            <a:spAutoFit/>
+          </a:bodyPr>
+          <a:lstStyle/>
+          <a:p>
+            <a:pPr algn="l">
+              <a:lnSpc>
+                <a:spcPct val="115000"/>
+              </a:lnSpc>
+            </a:pPr>
+            <a:r>
+              <a:rPr sz="1250" b="1" i="0">
+                <a:solidFill>
+                  <a:srgbClr val="2CE6C0"/>
+                </a:solidFill>
+                <a:latin typeface="Consolas"/>
+              </a:rPr>
+              <a:t>DIY</a:t>
+            </a:r>
+          </a:p>
+        </p:txBody>
+      </p:sp>
+      <p:sp>
+        <p:nvSpPr>
+          <p:cNvPr id="4" name="TextBox 3"/>
+          <p:cNvSpPr txBox="1"/>
+          <p:nvPr/>
+        </p:nvSpPr>
+        <p:spPr>
+          <a:xfrm>
+            <a:off x="457200" y="685800"/>
+            <a:ext cx="9875520" cy="640080"/>
+          </a:xfrm>
+          <a:prstGeom prst="rect">
+            <a:avLst/>
+          </a:prstGeom>
+          <a:noFill/>
+        </p:spPr>
+        <p:txBody>
+          <a:bodyPr wrap="square" anchor="t" lIns="0" rIns="0" tIns="0" bIns="0">
+            <a:spAutoFit/>
+          </a:bodyPr>
+          <a:lstStyle/>
+          <a:p>
+            <a:pPr algn="l">
+              <a:lnSpc>
+                <a:spcPct val="115000"/>
+              </a:lnSpc>
+            </a:pPr>
+            <a:r>
+              <a:rPr sz="2500" b="1" i="0">
+                <a:solidFill>
+                  <a:srgbClr val="E9F0F6"/>
+                </a:solidFill>
+                <a:latin typeface="Segoe UI"/>
+              </a:rPr>
+              <a:t>실습 과제 — 토의 / 자기주도 학습용</a:t>
+            </a:r>
+          </a:p>
+        </p:txBody>
+      </p:sp>
+      <p:sp>
+        <p:nvSpPr>
+          <p:cNvPr id="5" name="Rounded Rectangle 4"/>
+          <p:cNvSpPr/>
+          <p:nvPr/>
+        </p:nvSpPr>
+        <p:spPr>
+          <a:xfrm>
+            <a:off x="457200" y="1325880"/>
+            <a:ext cx="11247120" cy="713232"/>
+          </a:xfrm>
+          <a:prstGeom prst="roundRect">
+            <a:avLst>
+              <a:gd name="adj" fmla="val 8000"/>
+            </a:avLst>
+          </a:prstGeom>
+          <a:solidFill>
+            <a:srgbClr val="141C28"/>
+          </a:solidFill>
+          <a:ln>
+            <a:noFill/>
+          </a:ln>
+          <a:effectLst/>
+        </p:spPr>
+        <p:style>
+          <a:lnRef idx="1">
+            <a:schemeClr val="accent1"/>
+          </a:lnRef>
+          <a:fillRef idx="3">
+            <a:schemeClr val="accent1"/>
+          </a:fillRef>
+          <a:effectRef idx="2">
+            <a:schemeClr val="accent1"/>
+          </a:effectRef>
+          <a:fontRef idx="minor">
+            <a:schemeClr val="lt1"/>
+          </a:fontRef>
+        </p:style>
+        <p:txBody>
+          <a:bodyPr rtlCol="0" anchor="ctr"/>
+          <a:lstStyle/>
+          <a:p>
+            <a:pPr algn="ctr"/>
+          </a:p>
+        </p:txBody>
+      </p:sp>
+      <p:sp>
+        <p:nvSpPr>
+          <p:cNvPr id="6" name="Oval 5"/>
+          <p:cNvSpPr/>
+          <p:nvPr/>
+        </p:nvSpPr>
+        <p:spPr>
+          <a:xfrm>
+            <a:off x="658368" y="1485900"/>
+            <a:ext cx="457200" cy="457200"/>
+          </a:xfrm>
+          <a:prstGeom prst="ellipse">
+            <a:avLst/>
+          </a:prstGeom>
+          <a:solidFill>
+            <a:srgbClr val="17A98C"/>
+          </a:solidFill>
+          <a:ln>
+            <a:noFill/>
+          </a:ln>
+          <a:effectLst/>
+        </p:spPr>
+        <p:style>
+          <a:lnRef idx="1">
+            <a:schemeClr val="accent1"/>
+          </a:lnRef>
+          <a:fillRef idx="3">
+            <a:schemeClr val="accent1"/>
+          </a:fillRef>
+          <a:effectRef idx="2">
+            <a:schemeClr val="accent1"/>
+          </a:effectRef>
+          <a:fontRef idx="minor">
+            <a:schemeClr val="lt1"/>
+          </a:fontRef>
+        </p:style>
+        <p:txBody>
+          <a:bodyPr rtlCol="0" anchor="ctr" lIns="0" rIns="0" tIns="0" bIns="0"/>
+          <a:lstStyle/>
+          <a:p>
+            <a:pPr algn="ctr"/>
+            <a:r>
+              <a:rPr sz="900" b="1">
+                <a:solidFill>
+                  <a:srgbClr val="101722"/>
+                </a:solidFill>
+                <a:latin typeface="Segoe UI"/>
+              </a:rPr>
+              <a:t>★</a:t>
+            </a:r>
+          </a:p>
+        </p:txBody>
+      </p:sp>
+      <p:sp>
+        <p:nvSpPr>
+          <p:cNvPr id="7" name="TextBox 6"/>
+          <p:cNvSpPr txBox="1"/>
+          <p:nvPr/>
+        </p:nvSpPr>
+        <p:spPr>
+          <a:xfrm>
+            <a:off x="1371600" y="1399032"/>
+            <a:ext cx="10149840" cy="566928"/>
+          </a:xfrm>
+          <a:prstGeom prst="rect">
+            <a:avLst/>
+          </a:prstGeom>
+          <a:noFill/>
+        </p:spPr>
+        <p:txBody>
+          <a:bodyPr wrap="square" anchor="ctr" lIns="0" rIns="0" tIns="0" bIns="0">
+            <a:spAutoFit/>
+          </a:bodyPr>
+          <a:lstStyle/>
+          <a:p>
+            <a:pPr algn="l">
+              <a:lnSpc>
+                <a:spcPct val="120000"/>
+              </a:lnSpc>
+            </a:pPr>
+            <a:r>
+              <a:rPr sz="1150" b="0" i="0">
+                <a:solidFill>
+                  <a:srgbClr val="E9F0F6"/>
+                </a:solidFill>
+                <a:latin typeface="Segoe UI"/>
+              </a:rPr>
+              <a:t>resolution을 0.2→2.5로 바꿔가며 클러스터 수를 기록하고, 터미널 로그에서 어느 지점에 "과분할"이 시작되는지 확인해 설명하라.</a:t>
+            </a:r>
+          </a:p>
+        </p:txBody>
+      </p:sp>
+      <p:sp>
+        <p:nvSpPr>
+          <p:cNvPr id="8" name="Rounded Rectangle 7"/>
+          <p:cNvSpPr/>
+          <p:nvPr/>
+        </p:nvSpPr>
+        <p:spPr>
+          <a:xfrm>
+            <a:off x="457200" y="2112264"/>
+            <a:ext cx="11247120" cy="713232"/>
+          </a:xfrm>
+          <a:prstGeom prst="roundRect">
+            <a:avLst>
+              <a:gd name="adj" fmla="val 8000"/>
+            </a:avLst>
+          </a:prstGeom>
+          <a:solidFill>
+            <a:srgbClr val="141C28"/>
+          </a:solidFill>
+          <a:ln>
+            <a:noFill/>
+          </a:ln>
+          <a:effectLst/>
+        </p:spPr>
+        <p:style>
+          <a:lnRef idx="1">
+            <a:schemeClr val="accent1"/>
+          </a:lnRef>
+          <a:fillRef idx="3">
+            <a:schemeClr val="accent1"/>
+          </a:fillRef>
+          <a:effectRef idx="2">
+            <a:schemeClr val="accent1"/>
+          </a:effectRef>
+          <a:fontRef idx="minor">
+            <a:schemeClr val="lt1"/>
+          </a:fontRef>
+        </p:style>
+        <p:txBody>
+          <a:bodyPr rtlCol="0" anchor="ctr"/>
+          <a:lstStyle/>
+          <a:p>
+            <a:pPr algn="ctr"/>
+          </a:p>
+        </p:txBody>
+      </p:sp>
+      <p:sp>
+        <p:nvSpPr>
+          <p:cNvPr id="9" name="Oval 8"/>
+          <p:cNvSpPr/>
+          <p:nvPr/>
+        </p:nvSpPr>
+        <p:spPr>
+          <a:xfrm>
+            <a:off x="658368" y="2272284"/>
+            <a:ext cx="457200" cy="457200"/>
+          </a:xfrm>
+          <a:prstGeom prst="ellipse">
+            <a:avLst/>
+          </a:prstGeom>
+          <a:solidFill>
+            <a:srgbClr val="17A98C"/>
+          </a:solidFill>
+          <a:ln>
+            <a:noFill/>
+          </a:ln>
+          <a:effectLst/>
+        </p:spPr>
+        <p:style>
+          <a:lnRef idx="1">
+            <a:schemeClr val="accent1"/>
+          </a:lnRef>
+          <a:fillRef idx="3">
+            <a:schemeClr val="accent1"/>
+          </a:fillRef>
+          <a:effectRef idx="2">
+            <a:schemeClr val="accent1"/>
+          </a:effectRef>
+          <a:fontRef idx="minor">
+            <a:schemeClr val="lt1"/>
+          </a:fontRef>
+        </p:style>
+        <p:txBody>
+          <a:bodyPr rtlCol="0" anchor="ctr" lIns="0" rIns="0" tIns="0" bIns="0"/>
+          <a:lstStyle/>
+          <a:p>
+            <a:pPr algn="ctr"/>
+            <a:r>
+              <a:rPr sz="900" b="1">
+                <a:solidFill>
+                  <a:srgbClr val="101722"/>
+                </a:solidFill>
+                <a:latin typeface="Segoe UI"/>
+              </a:rPr>
+              <a:t>★</a:t>
+            </a:r>
+          </a:p>
+        </p:txBody>
+      </p:sp>
+      <p:sp>
+        <p:nvSpPr>
+          <p:cNvPr id="10" name="TextBox 9"/>
+          <p:cNvSpPr txBox="1"/>
+          <p:nvPr/>
+        </p:nvSpPr>
+        <p:spPr>
+          <a:xfrm>
+            <a:off x="1371600" y="2185416"/>
+            <a:ext cx="10149840" cy="566928"/>
+          </a:xfrm>
+          <a:prstGeom prst="rect">
+            <a:avLst/>
+          </a:prstGeom>
+          <a:noFill/>
+        </p:spPr>
+        <p:txBody>
+          <a:bodyPr wrap="square" anchor="ctr" lIns="0" rIns="0" tIns="0" bIns="0">
+            <a:spAutoFit/>
+          </a:bodyPr>
+          <a:lstStyle/>
+          <a:p>
+            <a:pPr algn="l">
+              <a:lnSpc>
+                <a:spcPct val="120000"/>
+              </a:lnSpc>
+            </a:pPr>
+            <a:r>
+              <a:rPr sz="1150" b="0" i="0">
+                <a:solidFill>
+                  <a:srgbClr val="E9F0F6"/>
+                </a:solidFill>
+                <a:latin typeface="Segoe UI"/>
+              </a:rPr>
+              <a:t>min genes/cell을 극단적으로 올려 세포를 절반 이하로 줄인 뒤, 같은 유전자의 padj가 어떻게 변하는지 비교하라 (통계적 검정력 ↔ 표본 크기).</a:t>
+            </a:r>
+          </a:p>
+        </p:txBody>
+      </p:sp>
+      <p:sp>
+        <p:nvSpPr>
+          <p:cNvPr id="11" name="Rounded Rectangle 10"/>
+          <p:cNvSpPr/>
+          <p:nvPr/>
+        </p:nvSpPr>
+        <p:spPr>
+          <a:xfrm>
+            <a:off x="457200" y="2898648"/>
+            <a:ext cx="11247120" cy="713232"/>
+          </a:xfrm>
+          <a:prstGeom prst="roundRect">
+            <a:avLst>
+              <a:gd name="adj" fmla="val 8000"/>
+            </a:avLst>
+          </a:prstGeom>
+          <a:solidFill>
+            <a:srgbClr val="141C28"/>
+          </a:solidFill>
+          <a:ln>
+            <a:noFill/>
+          </a:ln>
+          <a:effectLst/>
+        </p:spPr>
+        <p:style>
+          <a:lnRef idx="1">
+            <a:schemeClr val="accent1"/>
+          </a:lnRef>
+          <a:fillRef idx="3">
+            <a:schemeClr val="accent1"/>
+          </a:fillRef>
+          <a:effectRef idx="2">
+            <a:schemeClr val="accent1"/>
+          </a:effectRef>
+          <a:fontRef idx="minor">
+            <a:schemeClr val="lt1"/>
+          </a:fontRef>
+        </p:style>
+        <p:txBody>
+          <a:bodyPr rtlCol="0" anchor="ctr"/>
+          <a:lstStyle/>
+          <a:p>
+            <a:pPr algn="ctr"/>
+          </a:p>
+        </p:txBody>
+      </p:sp>
+      <p:sp>
+        <p:nvSpPr>
+          <p:cNvPr id="12" name="Oval 11"/>
+          <p:cNvSpPr/>
+          <p:nvPr/>
+        </p:nvSpPr>
+        <p:spPr>
+          <a:xfrm>
+            <a:off x="658368" y="3058668"/>
+            <a:ext cx="457200" cy="457200"/>
+          </a:xfrm>
+          <a:prstGeom prst="ellipse">
+            <a:avLst/>
+          </a:prstGeom>
+          <a:solidFill>
+            <a:srgbClr val="49B6FF"/>
+          </a:solidFill>
+          <a:ln>
+            <a:noFill/>
+          </a:ln>
+          <a:effectLst/>
+        </p:spPr>
+        <p:style>
+          <a:lnRef idx="1">
+            <a:schemeClr val="accent1"/>
+          </a:lnRef>
+          <a:fillRef idx="3">
+            <a:schemeClr val="accent1"/>
+          </a:fillRef>
+          <a:effectRef idx="2">
+            <a:schemeClr val="accent1"/>
+          </a:effectRef>
+          <a:fontRef idx="minor">
+            <a:schemeClr val="lt1"/>
+          </a:fontRef>
+        </p:style>
+        <p:txBody>
+          <a:bodyPr rtlCol="0" anchor="ctr" lIns="0" rIns="0" tIns="0" bIns="0"/>
+          <a:lstStyle/>
+          <a:p>
+            <a:pPr algn="ctr"/>
+            <a:r>
+              <a:rPr sz="900" b="1">
+                <a:solidFill>
+                  <a:srgbClr val="101722"/>
+                </a:solidFill>
+                <a:latin typeface="Segoe UI"/>
+              </a:rPr>
+              <a:t>★★</a:t>
+            </a:r>
+          </a:p>
+        </p:txBody>
+      </p:sp>
+      <p:sp>
+        <p:nvSpPr>
+          <p:cNvPr id="13" name="TextBox 12"/>
+          <p:cNvSpPr txBox="1"/>
+          <p:nvPr/>
+        </p:nvSpPr>
+        <p:spPr>
+          <a:xfrm>
+            <a:off x="1371600" y="2971800"/>
+            <a:ext cx="10149840" cy="566928"/>
+          </a:xfrm>
+          <a:prstGeom prst="rect">
+            <a:avLst/>
+          </a:prstGeom>
+          <a:noFill/>
+        </p:spPr>
+        <p:txBody>
+          <a:bodyPr wrap="square" anchor="ctr" lIns="0" rIns="0" tIns="0" bIns="0">
+            <a:spAutoFit/>
+          </a:bodyPr>
+          <a:lstStyle/>
+          <a:p>
+            <a:pPr algn="l">
+              <a:lnSpc>
+                <a:spcPct val="120000"/>
+              </a:lnSpc>
+            </a:pPr>
+            <a:r>
+              <a:rPr sz="1150" b="0" i="0">
+                <a:solidFill>
+                  <a:srgbClr val="E9F0F6"/>
+                </a:solidFill>
+                <a:latin typeface="Segoe UI"/>
+              </a:rPr>
+              <a:t>02번 탭에서 compensation을 끄고/켜고 CD3 vs CD19 플롯을 비교하고, 왜 겉보기 이중양성이 사라지는지 설명하라.</a:t>
+            </a:r>
+          </a:p>
+        </p:txBody>
+      </p:sp>
+      <p:sp>
+        <p:nvSpPr>
+          <p:cNvPr id="14" name="Rounded Rectangle 13"/>
+          <p:cNvSpPr/>
+          <p:nvPr/>
+        </p:nvSpPr>
+        <p:spPr>
+          <a:xfrm>
+            <a:off x="457200" y="3685032"/>
+            <a:ext cx="11247120" cy="713232"/>
+          </a:xfrm>
+          <a:prstGeom prst="roundRect">
+            <a:avLst>
+              <a:gd name="adj" fmla="val 8000"/>
+            </a:avLst>
+          </a:prstGeom>
+          <a:solidFill>
+            <a:srgbClr val="141C28"/>
+          </a:solidFill>
+          <a:ln>
+            <a:noFill/>
+          </a:ln>
+          <a:effectLst/>
+        </p:spPr>
+        <p:style>
+          <a:lnRef idx="1">
+            <a:schemeClr val="accent1"/>
+          </a:lnRef>
+          <a:fillRef idx="3">
+            <a:schemeClr val="accent1"/>
+          </a:fillRef>
+          <a:effectRef idx="2">
+            <a:schemeClr val="accent1"/>
+          </a:effectRef>
+          <a:fontRef idx="minor">
+            <a:schemeClr val="lt1"/>
+          </a:fontRef>
+        </p:style>
+        <p:txBody>
+          <a:bodyPr rtlCol="0" anchor="ctr"/>
+          <a:lstStyle/>
+          <a:p>
+            <a:pPr algn="ctr"/>
+          </a:p>
+        </p:txBody>
+      </p:sp>
+      <p:sp>
+        <p:nvSpPr>
+          <p:cNvPr id="15" name="Oval 14"/>
+          <p:cNvSpPr/>
+          <p:nvPr/>
+        </p:nvSpPr>
+        <p:spPr>
+          <a:xfrm>
+            <a:off x="658368" y="3845052"/>
+            <a:ext cx="457200" cy="457200"/>
+          </a:xfrm>
+          <a:prstGeom prst="ellipse">
+            <a:avLst/>
+          </a:prstGeom>
+          <a:solidFill>
+            <a:srgbClr val="49B6FF"/>
+          </a:solidFill>
+          <a:ln>
+            <a:noFill/>
+          </a:ln>
+          <a:effectLst/>
+        </p:spPr>
+        <p:style>
+          <a:lnRef idx="1">
+            <a:schemeClr val="accent1"/>
+          </a:lnRef>
+          <a:fillRef idx="3">
+            <a:schemeClr val="accent1"/>
+          </a:fillRef>
+          <a:effectRef idx="2">
+            <a:schemeClr val="accent1"/>
+          </a:effectRef>
+          <a:fontRef idx="minor">
+            <a:schemeClr val="lt1"/>
+          </a:fontRef>
+        </p:style>
+        <p:txBody>
+          <a:bodyPr rtlCol="0" anchor="ctr" lIns="0" rIns="0" tIns="0" bIns="0"/>
+          <a:lstStyle/>
+          <a:p>
+            <a:pPr algn="ctr"/>
+            <a:r>
+              <a:rPr sz="900" b="1">
+                <a:solidFill>
+                  <a:srgbClr val="101722"/>
+                </a:solidFill>
+                <a:latin typeface="Segoe UI"/>
+              </a:rPr>
+              <a:t>★★</a:t>
+            </a:r>
+          </a:p>
+        </p:txBody>
+      </p:sp>
+      <p:sp>
+        <p:nvSpPr>
+          <p:cNvPr id="16" name="TextBox 15"/>
+          <p:cNvSpPr txBox="1"/>
+          <p:nvPr/>
+        </p:nvSpPr>
+        <p:spPr>
+          <a:xfrm>
+            <a:off x="1371600" y="3758184"/>
+            <a:ext cx="10149840" cy="566928"/>
+          </a:xfrm>
+          <a:prstGeom prst="rect">
+            <a:avLst/>
+          </a:prstGeom>
+          <a:noFill/>
+        </p:spPr>
+        <p:txBody>
+          <a:bodyPr wrap="square" anchor="ctr" lIns="0" rIns="0" tIns="0" bIns="0">
+            <a:spAutoFit/>
+          </a:bodyPr>
+          <a:lstStyle/>
+          <a:p>
+            <a:pPr algn="l">
+              <a:lnSpc>
+                <a:spcPct val="120000"/>
+              </a:lnSpc>
+            </a:pPr>
+            <a:r>
+              <a:rPr sz="1150" b="0" i="0">
+                <a:solidFill>
+                  <a:srgbClr val="E9F0F6"/>
+                </a:solidFill>
+                <a:latin typeface="Segoe UI"/>
+              </a:rPr>
+              <a:t>05번 탭에서 클러스터별 마커 증거만 보고 세포 유형을 먼저 추측한 뒤, 실제로 어떤 근거가 부족했는지 스스로 평가하라.</a:t>
+            </a:r>
+          </a:p>
+        </p:txBody>
+      </p:sp>
+      <p:sp>
+        <p:nvSpPr>
+          <p:cNvPr id="17" name="Rounded Rectangle 16"/>
+          <p:cNvSpPr/>
+          <p:nvPr/>
+        </p:nvSpPr>
+        <p:spPr>
+          <a:xfrm>
+            <a:off x="457200" y="4471416"/>
+            <a:ext cx="11247120" cy="713232"/>
+          </a:xfrm>
+          <a:prstGeom prst="roundRect">
+            <a:avLst>
+              <a:gd name="adj" fmla="val 8000"/>
+            </a:avLst>
+          </a:prstGeom>
+          <a:solidFill>
+            <a:srgbClr val="141C28"/>
+          </a:solidFill>
+          <a:ln>
+            <a:noFill/>
+          </a:ln>
+          <a:effectLst/>
+        </p:spPr>
+        <p:style>
+          <a:lnRef idx="1">
+            <a:schemeClr val="accent1"/>
+          </a:lnRef>
+          <a:fillRef idx="3">
+            <a:schemeClr val="accent1"/>
+          </a:fillRef>
+          <a:effectRef idx="2">
+            <a:schemeClr val="accent1"/>
+          </a:effectRef>
+          <a:fontRef idx="minor">
+            <a:schemeClr val="lt1"/>
+          </a:fontRef>
+        </p:style>
+        <p:txBody>
+          <a:bodyPr rtlCol="0" anchor="ctr"/>
+          <a:lstStyle/>
+          <a:p>
+            <a:pPr algn="ctr"/>
+          </a:p>
+        </p:txBody>
+      </p:sp>
+      <p:sp>
+        <p:nvSpPr>
+          <p:cNvPr id="18" name="Oval 17"/>
+          <p:cNvSpPr/>
+          <p:nvPr/>
+        </p:nvSpPr>
+        <p:spPr>
+          <a:xfrm>
+            <a:off x="658368" y="4631436"/>
+            <a:ext cx="457200" cy="457200"/>
+          </a:xfrm>
+          <a:prstGeom prst="ellipse">
+            <a:avLst/>
+          </a:prstGeom>
+          <a:solidFill>
+            <a:srgbClr val="49B6FF"/>
+          </a:solidFill>
+          <a:ln>
+            <a:noFill/>
+          </a:ln>
+          <a:effectLst/>
+        </p:spPr>
+        <p:style>
+          <a:lnRef idx="1">
+            <a:schemeClr val="accent1"/>
+          </a:lnRef>
+          <a:fillRef idx="3">
+            <a:schemeClr val="accent1"/>
+          </a:fillRef>
+          <a:effectRef idx="2">
+            <a:schemeClr val="accent1"/>
+          </a:effectRef>
+          <a:fontRef idx="minor">
+            <a:schemeClr val="lt1"/>
+          </a:fontRef>
+        </p:style>
+        <p:txBody>
+          <a:bodyPr rtlCol="0" anchor="ctr" lIns="0" rIns="0" tIns="0" bIns="0"/>
+          <a:lstStyle/>
+          <a:p>
+            <a:pPr algn="ctr"/>
+            <a:r>
+              <a:rPr sz="900" b="1">
+                <a:solidFill>
+                  <a:srgbClr val="101722"/>
+                </a:solidFill>
+                <a:latin typeface="Segoe UI"/>
+              </a:rPr>
+              <a:t>★★</a:t>
+            </a:r>
+          </a:p>
+        </p:txBody>
+      </p:sp>
+      <p:sp>
+        <p:nvSpPr>
+          <p:cNvPr id="19" name="TextBox 18"/>
+          <p:cNvSpPr txBox="1"/>
+          <p:nvPr/>
+        </p:nvSpPr>
+        <p:spPr>
+          <a:xfrm>
+            <a:off x="1371600" y="4544568"/>
+            <a:ext cx="10149840" cy="566928"/>
+          </a:xfrm>
+          <a:prstGeom prst="rect">
+            <a:avLst/>
+          </a:prstGeom>
+          <a:noFill/>
+        </p:spPr>
+        <p:txBody>
+          <a:bodyPr wrap="square" anchor="ctr" lIns="0" rIns="0" tIns="0" bIns="0">
+            <a:spAutoFit/>
+          </a:bodyPr>
+          <a:lstStyle/>
+          <a:p>
+            <a:pPr algn="l">
+              <a:lnSpc>
+                <a:spcPct val="120000"/>
+              </a:lnSpc>
+            </a:pPr>
+            <a:r>
+              <a:rPr sz="1150" b="0" i="0">
+                <a:solidFill>
+                  <a:srgbClr val="E9F0F6"/>
+                </a:solidFill>
+                <a:latin typeface="Segoe UI"/>
+              </a:rPr>
+              <a:t>07번 탭에서 root cluster를 바꿔가며 pseudotime을 다시 계산하고, gene trend 그래프가 root 선택에 따라 어떻게 달라지는지 비교하라.</a:t>
+            </a:r>
+          </a:p>
+        </p:txBody>
+      </p:sp>
+      <p:sp>
+        <p:nvSpPr>
+          <p:cNvPr id="20" name="Rounded Rectangle 19"/>
+          <p:cNvSpPr/>
+          <p:nvPr/>
+        </p:nvSpPr>
+        <p:spPr>
+          <a:xfrm>
+            <a:off x="457200" y="5257800"/>
+            <a:ext cx="11247120" cy="713232"/>
+          </a:xfrm>
+          <a:prstGeom prst="roundRect">
+            <a:avLst>
+              <a:gd name="adj" fmla="val 8000"/>
+            </a:avLst>
+          </a:prstGeom>
+          <a:solidFill>
+            <a:srgbClr val="141C28"/>
+          </a:solidFill>
+          <a:ln>
+            <a:noFill/>
+          </a:ln>
+          <a:effectLst/>
+        </p:spPr>
+        <p:style>
+          <a:lnRef idx="1">
+            <a:schemeClr val="accent1"/>
+          </a:lnRef>
+          <a:fillRef idx="3">
+            <a:schemeClr val="accent1"/>
+          </a:fillRef>
+          <a:effectRef idx="2">
+            <a:schemeClr val="accent1"/>
+          </a:effectRef>
+          <a:fontRef idx="minor">
+            <a:schemeClr val="lt1"/>
+          </a:fontRef>
+        </p:style>
+        <p:txBody>
+          <a:bodyPr rtlCol="0" anchor="ctr"/>
+          <a:lstStyle/>
+          <a:p>
+            <a:pPr algn="ctr"/>
+          </a:p>
+        </p:txBody>
+      </p:sp>
+      <p:sp>
+        <p:nvSpPr>
+          <p:cNvPr id="21" name="Oval 20"/>
+          <p:cNvSpPr/>
+          <p:nvPr/>
+        </p:nvSpPr>
+        <p:spPr>
+          <a:xfrm>
+            <a:off x="658368" y="5417820"/>
+            <a:ext cx="457200" cy="457200"/>
+          </a:xfrm>
+          <a:prstGeom prst="ellipse">
+            <a:avLst/>
+          </a:prstGeom>
+          <a:solidFill>
+            <a:srgbClr val="E05A7A"/>
+          </a:solidFill>
+          <a:ln>
+            <a:noFill/>
+          </a:ln>
+          <a:effectLst/>
+        </p:spPr>
+        <p:style>
+          <a:lnRef idx="1">
+            <a:schemeClr val="accent1"/>
+          </a:lnRef>
+          <a:fillRef idx="3">
+            <a:schemeClr val="accent1"/>
+          </a:fillRef>
+          <a:effectRef idx="2">
+            <a:schemeClr val="accent1"/>
+          </a:effectRef>
+          <a:fontRef idx="minor">
+            <a:schemeClr val="lt1"/>
+          </a:fontRef>
+        </p:style>
+        <p:txBody>
+          <a:bodyPr rtlCol="0" anchor="ctr" lIns="0" rIns="0" tIns="0" bIns="0"/>
+          <a:lstStyle/>
+          <a:p>
+            <a:pPr algn="ctr"/>
+            <a:r>
+              <a:rPr sz="900" b="1">
+                <a:solidFill>
+                  <a:srgbClr val="101722"/>
+                </a:solidFill>
+                <a:latin typeface="Segoe UI"/>
+              </a:rPr>
+              <a:t>★★★</a:t>
+            </a:r>
+          </a:p>
+        </p:txBody>
+      </p:sp>
+      <p:sp>
+        <p:nvSpPr>
+          <p:cNvPr id="22" name="TextBox 21"/>
+          <p:cNvSpPr txBox="1"/>
+          <p:nvPr/>
+        </p:nvSpPr>
+        <p:spPr>
+          <a:xfrm>
+            <a:off x="1371600" y="5330952"/>
+            <a:ext cx="10149840" cy="566928"/>
+          </a:xfrm>
+          <a:prstGeom prst="rect">
+            <a:avLst/>
+          </a:prstGeom>
+          <a:noFill/>
+        </p:spPr>
+        <p:txBody>
+          <a:bodyPr wrap="square" anchor="ctr" lIns="0" rIns="0" tIns="0" bIns="0">
+            <a:spAutoFit/>
+          </a:bodyPr>
+          <a:lstStyle/>
+          <a:p>
+            <a:pPr algn="l">
+              <a:lnSpc>
+                <a:spcPct val="120000"/>
+              </a:lnSpc>
+            </a:pPr>
+            <a:r>
+              <a:rPr sz="1150" b="0" i="0">
+                <a:solidFill>
+                  <a:srgbClr val="E9F0F6"/>
+                </a:solidFill>
+                <a:latin typeface="Segoe UI"/>
+              </a:rPr>
+              <a:t>kNN neighbors를 5·15·30으로 바꿔가며 클러스터링과 PAGA 연결 그래프가 어떻게 달라지는지 관찰하고, 그래프 밀도와 모듈성의 관계를 설명하라.</a:t>
+            </a:r>
+          </a:p>
+        </p:txBody>
+      </p:sp>
+      <p:sp>
+        <p:nvSpPr>
+          <p:cNvPr id="23" name="TextBox 22"/>
+          <p:cNvSpPr txBox="1"/>
+          <p:nvPr/>
+        </p:nvSpPr>
+        <p:spPr>
+          <a:xfrm>
+            <a:off x="10698480" y="6473952"/>
+            <a:ext cx="1280160" cy="274320"/>
+          </a:xfrm>
+          <a:prstGeom prst="rect">
+            <a:avLst/>
+          </a:prstGeom>
+          <a:noFill/>
+        </p:spPr>
+        <p:txBody>
+          <a:bodyPr wrap="square" anchor="t" lIns="0" rIns="0" tIns="0" bIns="0">
+            <a:spAutoFit/>
+          </a:bodyPr>
+          <a:lstStyle/>
+          <a:p>
+            <a:pPr algn="r">
+              <a:lnSpc>
+                <a:spcPct val="115000"/>
+              </a:lnSpc>
+            </a:pPr>
+            <a:r>
+              <a:rPr sz="1000" b="0" i="0">
+                <a:solidFill>
+                  <a:srgbClr val="6F8090"/>
+                </a:solidFill>
+                <a:latin typeface="Consolas"/>
+              </a:rPr>
+              <a:t>27</a:t>
+            </a:r>
+          </a:p>
+        </p:txBody>
+      </p:sp>
+      <p:sp>
+        <p:nvSpPr>
+          <p:cNvPr id="24" name="TextBox 23"/>
+          <p:cNvSpPr txBox="1"/>
+          <p:nvPr/>
+        </p:nvSpPr>
+        <p:spPr>
+          <a:xfrm>
+            <a:off x="457200" y="6473952"/>
+            <a:ext cx="3657600" cy="274320"/>
+          </a:xfrm>
+          <a:prstGeom prst="rect">
+            <a:avLst/>
+          </a:prstGeom>
+          <a:noFill/>
+        </p:spPr>
+        <p:txBody>
+          <a:bodyPr wrap="square" anchor="t" lIns="0" rIns="0" tIns="0" bIns="0">
+            <a:spAutoFit/>
+          </a:bodyPr>
+          <a:lstStyle/>
+          <a:p>
+            <a:pPr algn="l">
+              <a:lnSpc>
+                <a:spcPct val="115000"/>
+              </a:lnSpc>
+            </a:pPr>
+            <a:r>
+              <a:rPr sz="1000" b="0" i="0">
+                <a:solidFill>
+                  <a:srgbClr val="6F8090"/>
+                </a:solidFill>
+                <a:latin typeface="Consolas"/>
+              </a:rPr>
+              <a:t>Cyto/Seq Console</a:t>
+            </a:r>
+          </a:p>
+        </p:txBody>
+      </p:sp>
+    </p:spTree>
+  </p:cSld>
+  <p:clrMapOvr>
+    <a:masterClrMapping/>
+  </p:clrMapOvr>
+</p:sld>
+</file>
+
+<file path=ppt/slides/slide28.xml><?xml version="1.0" encoding="utf-8"?>
 <p:sld xmlns:a="http://schemas.openxmlformats.org/drawingml/2006/main" xmlns:r="http://schemas.openxmlformats.org/officeDocument/2006/relationships" xmlns:p="http://schemas.openxmlformats.org/presentationml/2006/main">
   <p:cSld name="Slide 26">
     <p:bg>
@@ -29300,6 +33155,10 @@
           </a:solidFill>
           <a:ln/>
         </p:spPr>
+        <p:txBody>
+          <a:bodyPr/>
+          <a:p/>
+        </p:txBody>
       </p:sp>
       <p:sp>
         <p:nvSpPr>
@@ -29373,7 +33232,7 @@
                 <a:ea typeface="Consolas" pitchFamily="34" charset="-122"/>
                 <a:cs typeface="Consolas" pitchFamily="34" charset="-120"/>
               </a:rPr>
-              <a:t>26</a:t>
+              <a:t>28</a:t>
             </a:r>
             <a:endParaRPr lang="en-US" sz="900" dirty="0"/>
           </a:p>
@@ -29398,6 +33257,10 @@
           </a:solidFill>
           <a:ln/>
         </p:spPr>
+        <p:txBody>
+          <a:bodyPr/>
+          <a:p/>
+        </p:txBody>
       </p:sp>
       <p:sp>
         <p:nvSpPr>
@@ -29418,6 +33281,10 @@
           </a:solidFill>
           <a:ln/>
         </p:spPr>
+        <p:txBody>
+          <a:bodyPr/>
+          <a:p/>
+        </p:txBody>
       </p:sp>
       <p:sp>
         <p:nvSpPr>
